--- a/Project Submission Template for EduentFoundation_IBMUniversityEngagement-Bob.pptx
+++ b/Project Submission Template for EduentFoundation_IBMUniversityEngagement-Bob.pptx
@@ -5,7 +5,7 @@
     <p:sldMasterId id="2147483648" r:id="rId1"/>
   </p:sldMasterIdLst>
   <p:notesMasterIdLst>
-    <p:notesMasterId r:id="rId19"/>
+    <p:notesMasterId r:id="rId21"/>
   </p:notesMasterIdLst>
   <p:sldIdLst>
     <p:sldId id="283" r:id="rId2"/>
@@ -17,14 +17,16 @@
     <p:sldId id="278" r:id="rId8"/>
     <p:sldId id="279" r:id="rId9"/>
     <p:sldId id="262" r:id="rId10"/>
-    <p:sldId id="264" r:id="rId11"/>
-    <p:sldId id="277" r:id="rId12"/>
-    <p:sldId id="286" r:id="rId13"/>
-    <p:sldId id="287" r:id="rId14"/>
-    <p:sldId id="280" r:id="rId15"/>
-    <p:sldId id="288" r:id="rId16"/>
-    <p:sldId id="289" r:id="rId17"/>
-    <p:sldId id="276" r:id="rId18"/>
+    <p:sldId id="292" r:id="rId11"/>
+    <p:sldId id="293" r:id="rId12"/>
+    <p:sldId id="264" r:id="rId13"/>
+    <p:sldId id="277" r:id="rId14"/>
+    <p:sldId id="286" r:id="rId15"/>
+    <p:sldId id="287" r:id="rId16"/>
+    <p:sldId id="280" r:id="rId17"/>
+    <p:sldId id="288" r:id="rId18"/>
+    <p:sldId id="289" r:id="rId19"/>
+    <p:sldId id="276" r:id="rId20"/>
   </p:sldIdLst>
   <p:sldSz cx="12192000" cy="6858000"/>
   <p:notesSz cx="6858000" cy="9144000"/>
@@ -262,7 +264,7 @@
       <p15:sldGuideLst xmlns:p15="http://schemas.microsoft.com/office/powerpoint/2012/main"/>
     </p:ext>
     <p:ext uri="GoogleSlidesCustomDataVersion2">
-      <go:slidesCustomData xmlns:go="http://customooxmlschemas.google.com/" xmlns:ahyp="http://schemas.microsoft.com/office/drawing/2018/hyperlinkcolor" xmlns:p15="http://schemas.microsoft.com/office/powerpoint/2012/main" xmlns:p14="http://schemas.microsoft.com/office/powerpoint/2010/main" xmlns:com="http://schemas.openxmlformats.org/drawingml/2006/compatibility" xmlns:pvml="urn:schemas-microsoft-com:office:powerpoint" xmlns:v="urn:schemas-microsoft-com:vml" xmlns:o="urn:schemas-microsoft-com:office:office" xmlns:dgm="http://schemas.openxmlformats.org/drawingml/2006/diagram" xmlns:c="http://schemas.openxmlformats.org/drawingml/2006/chart" xmlns:mv="urn:schemas-microsoft-com:mac:vml" xmlns:mc="http://schemas.openxmlformats.org/markup-compatibility/2006" xmlns="" r:id="rId27" roundtripDataSignature="AMtx7mjt3491jQ7aCoyIz2WXeHKroE7tpQ=="/>
+      <go:slidesCustomData xmlns="" xmlns:mc="http://schemas.openxmlformats.org/markup-compatibility/2006" xmlns:mv="urn:schemas-microsoft-com:mac:vml" xmlns:c="http://schemas.openxmlformats.org/drawingml/2006/chart" xmlns:dgm="http://schemas.openxmlformats.org/drawingml/2006/diagram" xmlns:o="urn:schemas-microsoft-com:office:office" xmlns:v="urn:schemas-microsoft-com:vml" xmlns:pvml="urn:schemas-microsoft-com:office:powerpoint" xmlns:com="http://schemas.openxmlformats.org/drawingml/2006/compatibility" xmlns:p14="http://schemas.microsoft.com/office/powerpoint/2010/main" xmlns:p15="http://schemas.microsoft.com/office/powerpoint/2012/main" xmlns:ahyp="http://schemas.microsoft.com/office/drawing/2018/hyperlinkcolor" xmlns:go="http://customooxmlschemas.google.com/" r:id="rId27" roundtripDataSignature="AMtx7mjt3491jQ7aCoyIz2WXeHKroE7tpQ=="/>
     </p:ext>
   </p:extLst>
 </p:presentation>
@@ -11794,6 +11796,202 @@
   <p:cSld>
     <p:spTree>
       <p:nvGrpSpPr>
+        <p:cNvPr id="1" name=""/>
+        <p:cNvGrpSpPr/>
+        <p:nvPr/>
+      </p:nvGrpSpPr>
+      <p:grpSpPr>
+        <a:xfrm>
+          <a:off x="0" y="0"/>
+          <a:ext cx="0" cy="0"/>
+          <a:chOff x="0" y="0"/>
+          <a:chExt cx="0" cy="0"/>
+        </a:xfrm>
+      </p:grpSpPr>
+      <p:pic>
+        <p:nvPicPr>
+          <p:cNvPr id="5" name="Picture 4">
+            <a:extLst>
+              <a:ext uri="{FF2B5EF4-FFF2-40B4-BE49-F238E27FC236}">
+                <a16:creationId xmlns:a16="http://schemas.microsoft.com/office/drawing/2014/main" id="{B50B5AE1-3AC5-0E25-05B5-54446A0864FD}"/>
+              </a:ext>
+            </a:extLst>
+          </p:cNvPr>
+          <p:cNvPicPr>
+            <a:picLocks noChangeAspect="1"/>
+          </p:cNvPicPr>
+          <p:nvPr/>
+        </p:nvPicPr>
+        <p:blipFill>
+          <a:blip r:embed="rId2"/>
+          <a:stretch>
+            <a:fillRect/>
+          </a:stretch>
+        </p:blipFill>
+        <p:spPr>
+          <a:xfrm>
+            <a:off x="1368065" y="618197"/>
+            <a:ext cx="9455870" cy="5621606"/>
+          </a:xfrm>
+          <a:prstGeom prst="rect">
+            <a:avLst/>
+          </a:prstGeom>
+        </p:spPr>
+      </p:pic>
+      <p:sp>
+        <p:nvSpPr>
+          <p:cNvPr id="6" name="TextBox 5">
+            <a:extLst>
+              <a:ext uri="{FF2B5EF4-FFF2-40B4-BE49-F238E27FC236}">
+                <a16:creationId xmlns:a16="http://schemas.microsoft.com/office/drawing/2014/main" id="{64E8A8E1-EA56-6264-9733-3B346B3CC025}"/>
+              </a:ext>
+            </a:extLst>
+          </p:cNvPr>
+          <p:cNvSpPr txBox="1"/>
+          <p:nvPr/>
+        </p:nvSpPr>
+        <p:spPr>
+          <a:xfrm>
+            <a:off x="424207" y="156532"/>
+            <a:ext cx="7390614" cy="461665"/>
+          </a:xfrm>
+          <a:prstGeom prst="rect">
+            <a:avLst/>
+          </a:prstGeom>
+          <a:noFill/>
+        </p:spPr>
+        <p:txBody>
+          <a:bodyPr wrap="square" rtlCol="0">
+            <a:spAutoFit/>
+          </a:bodyPr>
+          <a:lstStyle/>
+          <a:p>
+            <a:r>
+              <a:rPr lang="en-IN" sz="2400" b="1" dirty="0">
+                <a:latin typeface="Times New Roman" panose="02020603050405020304" pitchFamily="18" charset="0"/>
+                <a:cs typeface="Times New Roman" panose="02020603050405020304" pitchFamily="18" charset="0"/>
+              </a:rPr>
+              <a:t>Screenshots of the Agentic AI Assistant in Action</a:t>
+            </a:r>
+          </a:p>
+        </p:txBody>
+      </p:sp>
+    </p:spTree>
+    <p:extLst>
+      <p:ext uri="{BB962C8B-B14F-4D97-AF65-F5344CB8AC3E}">
+        <p14:creationId xmlns:p14="http://schemas.microsoft.com/office/powerpoint/2010/main" val="3485480181"/>
+      </p:ext>
+    </p:extLst>
+  </p:cSld>
+  <p:clrMapOvr>
+    <a:masterClrMapping/>
+  </p:clrMapOvr>
+</p:sld>
+</file>
+
+<file path=ppt/slides/slide11.xml><?xml version="1.0" encoding="utf-8"?>
+<p:sld xmlns:a="http://schemas.openxmlformats.org/drawingml/2006/main" xmlns:r="http://schemas.openxmlformats.org/officeDocument/2006/relationships" xmlns:p="http://schemas.openxmlformats.org/presentationml/2006/main">
+  <p:cSld>
+    <p:spTree>
+      <p:nvGrpSpPr>
+        <p:cNvPr id="1" name=""/>
+        <p:cNvGrpSpPr/>
+        <p:nvPr/>
+      </p:nvGrpSpPr>
+      <p:grpSpPr>
+        <a:xfrm>
+          <a:off x="0" y="0"/>
+          <a:ext cx="0" cy="0"/>
+          <a:chOff x="0" y="0"/>
+          <a:chExt cx="0" cy="0"/>
+        </a:xfrm>
+      </p:grpSpPr>
+      <p:pic>
+        <p:nvPicPr>
+          <p:cNvPr id="3" name="Picture 2">
+            <a:extLst>
+              <a:ext uri="{FF2B5EF4-FFF2-40B4-BE49-F238E27FC236}">
+                <a16:creationId xmlns:a16="http://schemas.microsoft.com/office/drawing/2014/main" id="{49BB72F8-EDF0-C454-2B31-A020C472F523}"/>
+              </a:ext>
+            </a:extLst>
+          </p:cNvPr>
+          <p:cNvPicPr>
+            <a:picLocks noChangeAspect="1"/>
+          </p:cNvPicPr>
+          <p:nvPr/>
+        </p:nvPicPr>
+        <p:blipFill>
+          <a:blip r:embed="rId2"/>
+          <a:stretch>
+            <a:fillRect/>
+          </a:stretch>
+        </p:blipFill>
+        <p:spPr>
+          <a:xfrm>
+            <a:off x="1463637" y="618197"/>
+            <a:ext cx="9264725" cy="5671712"/>
+          </a:xfrm>
+          <a:prstGeom prst="rect">
+            <a:avLst/>
+          </a:prstGeom>
+        </p:spPr>
+      </p:pic>
+      <p:sp>
+        <p:nvSpPr>
+          <p:cNvPr id="4" name="TextBox 3">
+            <a:extLst>
+              <a:ext uri="{FF2B5EF4-FFF2-40B4-BE49-F238E27FC236}">
+                <a16:creationId xmlns:a16="http://schemas.microsoft.com/office/drawing/2014/main" id="{AE657055-1D35-0178-220D-4C1BF9A50448}"/>
+              </a:ext>
+            </a:extLst>
+          </p:cNvPr>
+          <p:cNvSpPr txBox="1"/>
+          <p:nvPr/>
+        </p:nvSpPr>
+        <p:spPr>
+          <a:xfrm>
+            <a:off x="424207" y="156532"/>
+            <a:ext cx="7390614" cy="461665"/>
+          </a:xfrm>
+          <a:prstGeom prst="rect">
+            <a:avLst/>
+          </a:prstGeom>
+          <a:noFill/>
+        </p:spPr>
+        <p:txBody>
+          <a:bodyPr wrap="square" rtlCol="0">
+            <a:spAutoFit/>
+          </a:bodyPr>
+          <a:lstStyle/>
+          <a:p>
+            <a:r>
+              <a:rPr lang="en-IN" sz="2400" b="1" dirty="0">
+                <a:latin typeface="Times New Roman" panose="02020603050405020304" pitchFamily="18" charset="0"/>
+                <a:cs typeface="Times New Roman" panose="02020603050405020304" pitchFamily="18" charset="0"/>
+              </a:rPr>
+              <a:t>Screenshots of the Agentic AI Assistant in Action</a:t>
+            </a:r>
+          </a:p>
+        </p:txBody>
+      </p:sp>
+    </p:spTree>
+    <p:extLst>
+      <p:ext uri="{BB962C8B-B14F-4D97-AF65-F5344CB8AC3E}">
+        <p14:creationId xmlns:p14="http://schemas.microsoft.com/office/powerpoint/2010/main" val="2954221165"/>
+      </p:ext>
+    </p:extLst>
+  </p:cSld>
+  <p:clrMapOvr>
+    <a:masterClrMapping/>
+  </p:clrMapOvr>
+</p:sld>
+</file>
+
+<file path=ppt/slides/slide12.xml><?xml version="1.0" encoding="utf-8"?>
+<p:sld xmlns:a="http://schemas.openxmlformats.org/drawingml/2006/main" xmlns:r="http://schemas.openxmlformats.org/officeDocument/2006/relationships" xmlns:p="http://schemas.openxmlformats.org/presentationml/2006/main">
+  <p:cSld>
+    <p:spTree>
+      <p:nvGrpSpPr>
         <p:cNvPr id="1" name="Shape 191"/>
         <p:cNvGrpSpPr/>
         <p:nvPr/>
@@ -11835,10 +12033,16 @@
           <a:lstStyle/>
           <a:p>
             <a:r>
-              <a:rPr lang="en-US" sz="2400" b="1" dirty="0"/>
-              <a:t>Role of Agentic AI in the solution </a:t>
+              <a:rPr lang="en-US" sz="2400" b="1" dirty="0">
+                <a:latin typeface="Times New Roman" panose="02020603050405020304" pitchFamily="18" charset="0"/>
+                <a:cs typeface="Times New Roman" panose="02020603050405020304" pitchFamily="18" charset="0"/>
+              </a:rPr>
+              <a:t>Role of Agentic AI in the Solution </a:t>
             </a:r>
-            <a:endParaRPr lang="en-IN" sz="2400" b="1" dirty="0"/>
+            <a:endParaRPr lang="en-IN" sz="2400" b="1" dirty="0">
+              <a:latin typeface="Times New Roman" panose="02020603050405020304" pitchFamily="18" charset="0"/>
+              <a:cs typeface="Times New Roman" panose="02020603050405020304" pitchFamily="18" charset="0"/>
+            </a:endParaRPr>
           </a:p>
         </p:txBody>
       </p:sp>
@@ -11870,34 +12074,55 @@
           </a:bodyPr>
           <a:lstStyle/>
           <a:p>
-            <a:endParaRPr lang="en-US" sz="1800" b="1" dirty="0"/>
+            <a:endParaRPr lang="en-US" sz="1800" b="1" dirty="0">
+              <a:latin typeface="Times New Roman" panose="02020603050405020304" pitchFamily="18" charset="0"/>
+              <a:cs typeface="Times New Roman" panose="02020603050405020304" pitchFamily="18" charset="0"/>
+            </a:endParaRPr>
           </a:p>
           <a:p>
             <a:r>
-              <a:rPr lang="en-US" sz="1800" b="1" dirty="0"/>
+              <a:rPr lang="en-US" sz="1800" b="1" dirty="0">
+                <a:latin typeface="Times New Roman" panose="02020603050405020304" pitchFamily="18" charset="0"/>
+                <a:cs typeface="Times New Roman" panose="02020603050405020304" pitchFamily="18" charset="0"/>
+              </a:rPr>
               <a:t>Role of Agentic AI in Research Agent</a:t>
             </a:r>
           </a:p>
           <a:p>
-            <a:endParaRPr lang="en-US" sz="1800" b="1" dirty="0"/>
+            <a:endParaRPr lang="en-US" sz="1800" b="1" dirty="0">
+              <a:latin typeface="Times New Roman" panose="02020603050405020304" pitchFamily="18" charset="0"/>
+              <a:cs typeface="Times New Roman" panose="02020603050405020304" pitchFamily="18" charset="0"/>
+            </a:endParaRPr>
           </a:p>
           <a:p>
             <a:r>
-              <a:rPr lang="en-US" sz="1600" dirty="0"/>
+              <a:rPr lang="en-US" sz="1600" dirty="0">
+                <a:latin typeface="Times New Roman" panose="02020603050405020304" pitchFamily="18" charset="0"/>
+                <a:cs typeface="Times New Roman" panose="02020603050405020304" pitchFamily="18" charset="0"/>
+              </a:rPr>
               <a:t>Agentic AI serves as the core intelligence and decision-making layer of </a:t>
             </a:r>
             <a:r>
-              <a:rPr lang="en-US" sz="1600" dirty="0" err="1"/>
+              <a:rPr lang="en-US" sz="1600" dirty="0" err="1">
+                <a:latin typeface="Times New Roman" panose="02020603050405020304" pitchFamily="18" charset="0"/>
+                <a:cs typeface="Times New Roman" panose="02020603050405020304" pitchFamily="18" charset="0"/>
+              </a:rPr>
               <a:t>ResearchMind</a:t>
             </a:r>
             <a:r>
-              <a:rPr lang="en-US" sz="1600" dirty="0"/>
+              <a:rPr lang="en-US" sz="1600" dirty="0">
+                <a:latin typeface="Times New Roman" panose="02020603050405020304" pitchFamily="18" charset="0"/>
+                <a:cs typeface="Times New Roman" panose="02020603050405020304" pitchFamily="18" charset="0"/>
+              </a:rPr>
               <a:t> AI, enabling the system to autonomously perform complex research activities with minimal user intervention. It interprets user queries, decomposes them into subtasks, and dynamically orchestrates specialized agents for literature mining, multimodal document processing, knowledge synthesis, trend analysis, and visualization. </a:t>
             </a:r>
           </a:p>
           <a:p>
             <a:r>
-              <a:rPr lang="en-US" sz="1600" dirty="0"/>
+              <a:rPr lang="en-US" sz="1600" dirty="0">
+                <a:latin typeface="Times New Roman" panose="02020603050405020304" pitchFamily="18" charset="0"/>
+                <a:cs typeface="Times New Roman" panose="02020603050405020304" pitchFamily="18" charset="0"/>
+              </a:rPr>
               <a:t>The agent continuously searches scholarly repositories, filters relevant publications, and integrates information from PDFs, notes, charts, and images to generate comprehensive insights. It further analyzes citation networks to identify missing references, detect research gaps, and suggest unexplored opportunities. </a:t>
             </a:r>
           </a:p>
@@ -11948,7 +12173,7 @@
         <p:spPr>
           <a:xfrm>
             <a:off x="6096000" y="4227508"/>
-            <a:ext cx="5831742" cy="2308324"/>
+            <a:ext cx="5831742" cy="2062103"/>
           </a:xfrm>
           <a:prstGeom prst="rect">
             <a:avLst/>
@@ -11962,37 +12187,61 @@
           <a:lstStyle/>
           <a:p>
             <a:r>
-              <a:rPr lang="en-US" sz="1600" dirty="0"/>
+              <a:rPr lang="en-US" sz="1600" dirty="0">
+                <a:latin typeface="Times New Roman" panose="02020603050405020304" pitchFamily="18" charset="0"/>
+                <a:cs typeface="Times New Roman" panose="02020603050405020304" pitchFamily="18" charset="0"/>
+              </a:rPr>
               <a:t>By monitoring publication growth, citation patterns, and emerging keywords, Agentic AI predicts promising future research directions and recommends potential hypotheses.</a:t>
             </a:r>
           </a:p>
           <a:p>
             <a:r>
-              <a:rPr lang="en-US" sz="1600" dirty="0"/>
+              <a:rPr lang="en-US" sz="1600" dirty="0">
+                <a:latin typeface="Times New Roman" panose="02020603050405020304" pitchFamily="18" charset="0"/>
+                <a:cs typeface="Times New Roman" panose="02020603050405020304" pitchFamily="18" charset="0"/>
+              </a:rPr>
               <a:t>Through continuous learning and adaptation to newly published work and user feedback, </a:t>
             </a:r>
             <a:r>
-              <a:rPr lang="en-US" sz="1600" dirty="0" err="1"/>
+              <a:rPr lang="en-US" sz="1600" dirty="0" err="1">
+                <a:latin typeface="Times New Roman" panose="02020603050405020304" pitchFamily="18" charset="0"/>
+                <a:cs typeface="Times New Roman" panose="02020603050405020304" pitchFamily="18" charset="0"/>
+              </a:rPr>
               <a:t>ResearchMind</a:t>
             </a:r>
             <a:r>
-              <a:rPr lang="en-US" sz="1600" dirty="0"/>
+              <a:rPr lang="en-US" sz="1600" dirty="0">
+                <a:latin typeface="Times New Roman" panose="02020603050405020304" pitchFamily="18" charset="0"/>
+                <a:cs typeface="Times New Roman" panose="02020603050405020304" pitchFamily="18" charset="0"/>
+              </a:rPr>
               <a:t> AI transforms from a passive search and </a:t>
             </a:r>
             <a:r>
-              <a:rPr lang="en-US" sz="1600" dirty="0" err="1"/>
+              <a:rPr lang="en-US" sz="1600" dirty="0" err="1">
+                <a:latin typeface="Times New Roman" panose="02020603050405020304" pitchFamily="18" charset="0"/>
+                <a:cs typeface="Times New Roman" panose="02020603050405020304" pitchFamily="18" charset="0"/>
+              </a:rPr>
               <a:t>summarisation</a:t>
             </a:r>
             <a:r>
-              <a:rPr lang="en-US" sz="1600" dirty="0"/>
+              <a:rPr lang="en-US" sz="1600" dirty="0">
+                <a:latin typeface="Times New Roman" panose="02020603050405020304" pitchFamily="18" charset="0"/>
+                <a:cs typeface="Times New Roman" panose="02020603050405020304" pitchFamily="18" charset="0"/>
+              </a:rPr>
               <a:t> tool into an intelligent, proactive research collaborator capable of discovering, </a:t>
             </a:r>
             <a:r>
-              <a:rPr lang="en-US" sz="1600" dirty="0" err="1"/>
+              <a:rPr lang="en-US" sz="1600" dirty="0" err="1">
+                <a:latin typeface="Times New Roman" panose="02020603050405020304" pitchFamily="18" charset="0"/>
+                <a:cs typeface="Times New Roman" panose="02020603050405020304" pitchFamily="18" charset="0"/>
+              </a:rPr>
               <a:t>analysing</a:t>
             </a:r>
             <a:r>
-              <a:rPr lang="en-US" sz="1600" dirty="0"/>
+              <a:rPr lang="en-US" sz="1600" dirty="0">
+                <a:latin typeface="Times New Roman" panose="02020603050405020304" pitchFamily="18" charset="0"/>
+                <a:cs typeface="Times New Roman" panose="02020603050405020304" pitchFamily="18" charset="0"/>
+              </a:rPr>
               <a:t>, predicting, and recommending actionable scientific insights.</a:t>
             </a:r>
           </a:p>
@@ -12006,7 +12255,7 @@
 </p:sld>
 </file>
 
-<file path=ppt/slides/slide11.xml><?xml version="1.0" encoding="utf-8"?>
+<file path=ppt/slides/slide13.xml><?xml version="1.0" encoding="utf-8"?>
 <p:sld xmlns:a="http://schemas.openxmlformats.org/drawingml/2006/main" xmlns:r="http://schemas.openxmlformats.org/officeDocument/2006/relationships" xmlns:p="http://schemas.openxmlformats.org/presentationml/2006/main">
   <p:cSld>
     <p:spTree>
@@ -12070,12 +12319,16 @@
               <a:buSzPts val="3500"/>
             </a:pPr>
             <a:r>
-              <a:rPr lang="en-US" sz="2400" b="1">
+              <a:rPr lang="en-US" sz="2400" b="1" dirty="0">
+                <a:latin typeface="Times New Roman" panose="02020603050405020304" pitchFamily="18" charset="0"/>
+                <a:cs typeface="Times New Roman" panose="02020603050405020304" pitchFamily="18" charset="0"/>
                 <a:sym typeface="Times New Roman"/>
               </a:rPr>
               <a:t>Token Usage </a:t>
             </a:r>
-            <a:endParaRPr sz="2400" b="1">
+            <a:endParaRPr sz="2400" b="1" dirty="0">
+              <a:latin typeface="Times New Roman" panose="02020603050405020304" pitchFamily="18" charset="0"/>
+              <a:cs typeface="Times New Roman" panose="02020603050405020304" pitchFamily="18" charset="0"/>
               <a:sym typeface="Times New Roman"/>
             </a:endParaRPr>
           </a:p>
@@ -12340,7 +12593,7 @@
 </p:sld>
 </file>
 
-<file path=ppt/slides/slide12.xml><?xml version="1.0" encoding="utf-8"?>
+<file path=ppt/slides/slide14.xml><?xml version="1.0" encoding="utf-8"?>
 <p:sld xmlns:a="http://schemas.openxmlformats.org/drawingml/2006/main" xmlns:r="http://schemas.openxmlformats.org/officeDocument/2006/relationships" xmlns:p="http://schemas.openxmlformats.org/presentationml/2006/main">
   <p:cSld>
     <p:spTree>
@@ -12392,10 +12645,16 @@
           <a:lstStyle/>
           <a:p>
             <a:r>
-              <a:rPr lang="en-US" sz="2400" b="1"/>
+              <a:rPr lang="en-US" sz="2400" b="1" dirty="0">
+                <a:latin typeface="Times New Roman" panose="02020603050405020304" pitchFamily="18" charset="0"/>
+                <a:cs typeface="Times New Roman" panose="02020603050405020304" pitchFamily="18" charset="0"/>
+              </a:rPr>
               <a:t>Novelty and Uniqueness</a:t>
             </a:r>
-            <a:endParaRPr lang="en-IN" sz="2400" b="1"/>
+            <a:endParaRPr lang="en-IN" sz="2400" b="1" dirty="0">
+              <a:latin typeface="Times New Roman" panose="02020603050405020304" pitchFamily="18" charset="0"/>
+              <a:cs typeface="Times New Roman" panose="02020603050405020304" pitchFamily="18" charset="0"/>
+            </a:endParaRPr>
           </a:p>
         </p:txBody>
       </p:sp>
@@ -12414,7 +12673,7 @@
         <p:spPr>
           <a:xfrm>
             <a:off x="777240" y="1408210"/>
-            <a:ext cx="10186133" cy="5262979"/>
+            <a:ext cx="10186133" cy="5016758"/>
           </a:xfrm>
           <a:prstGeom prst="rect">
             <a:avLst/>
@@ -12427,174 +12686,258 @@
           </a:bodyPr>
           <a:lstStyle/>
           <a:p>
-            <a:pPr marL="285750" indent="-285750">
+            <a:pPr marL="285750" indent="-285750" algn="just">
               <a:buFont typeface="Arial" panose="020B0604020202020204" pitchFamily="34" charset="0"/>
               <a:buChar char="•"/>
             </a:pPr>
             <a:r>
-              <a:rPr lang="en-IN" sz="1600" b="1" dirty="0"/>
+              <a:rPr lang="en-IN" sz="1600" b="1" dirty="0">
+                <a:latin typeface="Times New Roman" panose="02020603050405020304" pitchFamily="18" charset="0"/>
+                <a:cs typeface="Times New Roman" panose="02020603050405020304" pitchFamily="18" charset="0"/>
+              </a:rPr>
               <a:t>Autonomous Research Companion</a:t>
             </a:r>
             <a:r>
-              <a:rPr lang="en-IN" sz="1600" dirty="0"/>
+              <a:rPr lang="en-IN" sz="1600" dirty="0">
+                <a:latin typeface="Times New Roman" panose="02020603050405020304" pitchFamily="18" charset="0"/>
+                <a:cs typeface="Times New Roman" panose="02020603050405020304" pitchFamily="18" charset="0"/>
+              </a:rPr>
               <a:t> – Goes beyond conventional search engines by independently planning, executing, and refining research workflows using Agentic AI.</a:t>
             </a:r>
           </a:p>
           <a:p>
-            <a:pPr marL="285750" indent="-285750">
+            <a:pPr marL="285750" indent="-285750" algn="just">
               <a:buFont typeface="Arial" panose="020B0604020202020204" pitchFamily="34" charset="0"/>
               <a:buChar char="•"/>
             </a:pPr>
             <a:r>
-              <a:rPr lang="en-IN" sz="1600" b="1" dirty="0"/>
+              <a:rPr lang="en-IN" sz="1600" b="1" dirty="0">
+                <a:latin typeface="Times New Roman" panose="02020603050405020304" pitchFamily="18" charset="0"/>
+                <a:cs typeface="Times New Roman" panose="02020603050405020304" pitchFamily="18" charset="0"/>
+              </a:rPr>
               <a:t>Multimodal Knowledge Understanding</a:t>
             </a:r>
             <a:r>
-              <a:rPr lang="en-IN" sz="1600" dirty="0"/>
+              <a:rPr lang="en-IN" sz="1600" dirty="0">
+                <a:latin typeface="Times New Roman" panose="02020603050405020304" pitchFamily="18" charset="0"/>
+                <a:cs typeface="Times New Roman" panose="02020603050405020304" pitchFamily="18" charset="0"/>
+              </a:rPr>
               <a:t> – Simultaneously processes research papers, PDFs, handwritten notes, charts, tables, and images to generate unified insights.</a:t>
             </a:r>
           </a:p>
           <a:p>
-            <a:pPr marL="285750" indent="-285750">
+            <a:pPr marL="285750" indent="-285750" algn="just">
               <a:buFont typeface="Arial" panose="020B0604020202020204" pitchFamily="34" charset="0"/>
               <a:buChar char="•"/>
             </a:pPr>
             <a:r>
-              <a:rPr lang="en-IN" sz="1600" b="1" dirty="0"/>
+              <a:rPr lang="en-IN" sz="1600" b="1" dirty="0">
+                <a:latin typeface="Times New Roman" panose="02020603050405020304" pitchFamily="18" charset="0"/>
+                <a:cs typeface="Times New Roman" panose="02020603050405020304" pitchFamily="18" charset="0"/>
+              </a:rPr>
               <a:t>Citation Gap Detection</a:t>
             </a:r>
             <a:r>
-              <a:rPr lang="en-IN" sz="1600" dirty="0"/>
+              <a:rPr lang="en-IN" sz="1600" dirty="0">
+                <a:latin typeface="Times New Roman" panose="02020603050405020304" pitchFamily="18" charset="0"/>
+                <a:cs typeface="Times New Roman" panose="02020603050405020304" pitchFamily="18" charset="0"/>
+              </a:rPr>
               <a:t> – Identifies potentially missing references and related works, functioning as an intelligent peer-review assistant.</a:t>
             </a:r>
           </a:p>
           <a:p>
-            <a:pPr marL="285750" indent="-285750">
+            <a:pPr marL="285750" indent="-285750" algn="just">
               <a:buFont typeface="Arial" panose="020B0604020202020204" pitchFamily="34" charset="0"/>
               <a:buChar char="•"/>
             </a:pPr>
             <a:r>
-              <a:rPr lang="en-IN" sz="1600" b="1" dirty="0"/>
+              <a:rPr lang="en-IN" sz="1600" b="1" dirty="0">
+                <a:latin typeface="Times New Roman" panose="02020603050405020304" pitchFamily="18" charset="0"/>
+                <a:cs typeface="Times New Roman" panose="02020603050405020304" pitchFamily="18" charset="0"/>
+              </a:rPr>
               <a:t>Predictive Research Intelligence</a:t>
             </a:r>
             <a:r>
-              <a:rPr lang="en-IN" sz="1600" dirty="0"/>
+              <a:rPr lang="en-IN" sz="1600" dirty="0">
+                <a:latin typeface="Times New Roman" panose="02020603050405020304" pitchFamily="18" charset="0"/>
+                <a:cs typeface="Times New Roman" panose="02020603050405020304" pitchFamily="18" charset="0"/>
+              </a:rPr>
               <a:t> – Forecasts emerging research trends and promising future directions by </a:t>
             </a:r>
             <a:r>
-              <a:rPr lang="en-IN" sz="1600" dirty="0" err="1"/>
+              <a:rPr lang="en-IN" sz="1600" dirty="0" err="1">
+                <a:latin typeface="Times New Roman" panose="02020603050405020304" pitchFamily="18" charset="0"/>
+                <a:cs typeface="Times New Roman" panose="02020603050405020304" pitchFamily="18" charset="0"/>
+              </a:rPr>
               <a:t>analyzing</a:t>
             </a:r>
             <a:r>
-              <a:rPr lang="en-IN" sz="1600" dirty="0"/>
+              <a:rPr lang="en-IN" sz="1600" dirty="0">
+                <a:latin typeface="Times New Roman" panose="02020603050405020304" pitchFamily="18" charset="0"/>
+                <a:cs typeface="Times New Roman" panose="02020603050405020304" pitchFamily="18" charset="0"/>
+              </a:rPr>
               <a:t> publication growth, citation velocity, and keyword evolution.</a:t>
             </a:r>
           </a:p>
           <a:p>
-            <a:pPr marL="285750" indent="-285750">
+            <a:pPr marL="285750" indent="-285750" algn="just">
               <a:buFont typeface="Arial" panose="020B0604020202020204" pitchFamily="34" charset="0"/>
               <a:buChar char="•"/>
             </a:pPr>
             <a:r>
-              <a:rPr lang="en-IN" sz="1600" b="1" dirty="0"/>
+              <a:rPr lang="en-IN" sz="1600" b="1" dirty="0">
+                <a:latin typeface="Times New Roman" panose="02020603050405020304" pitchFamily="18" charset="0"/>
+                <a:cs typeface="Times New Roman" panose="02020603050405020304" pitchFamily="18" charset="0"/>
+              </a:rPr>
               <a:t>Dynamic Knowledge Graph Generation</a:t>
             </a:r>
             <a:r>
-              <a:rPr lang="en-IN" sz="1600" dirty="0"/>
+              <a:rPr lang="en-IN" sz="1600" dirty="0">
+                <a:latin typeface="Times New Roman" panose="02020603050405020304" pitchFamily="18" charset="0"/>
+                <a:cs typeface="Times New Roman" panose="02020603050405020304" pitchFamily="18" charset="0"/>
+              </a:rPr>
               <a:t> – Automatically constructs and updates interactive knowledge graphs connecting authors, methods, datasets, institutions, and publications.</a:t>
             </a:r>
           </a:p>
           <a:p>
-            <a:pPr marL="285750" indent="-285750">
+            <a:pPr marL="285750" indent="-285750" algn="just">
               <a:buFont typeface="Arial" panose="020B0604020202020204" pitchFamily="34" charset="0"/>
               <a:buChar char="•"/>
             </a:pPr>
             <a:r>
-              <a:rPr lang="en-IN" sz="1600" b="1" dirty="0"/>
+              <a:rPr lang="en-IN" sz="1600" b="1" dirty="0">
+                <a:latin typeface="Times New Roman" panose="02020603050405020304" pitchFamily="18" charset="0"/>
+                <a:cs typeface="Times New Roman" panose="02020603050405020304" pitchFamily="18" charset="0"/>
+              </a:rPr>
               <a:t>Research Opportunity Discovery</a:t>
             </a:r>
             <a:r>
-              <a:rPr lang="en-IN" sz="1600" dirty="0"/>
+              <a:rPr lang="en-IN" sz="1600" dirty="0">
+                <a:latin typeface="Times New Roman" panose="02020603050405020304" pitchFamily="18" charset="0"/>
+                <a:cs typeface="Times New Roman" panose="02020603050405020304" pitchFamily="18" charset="0"/>
+              </a:rPr>
               <a:t> – Suggests underexplored topics, novel hypotheses, and interdisciplinary connections rather than merely summarizing existing literature.</a:t>
             </a:r>
           </a:p>
           <a:p>
-            <a:pPr marL="285750" indent="-285750">
+            <a:pPr marL="285750" indent="-285750" algn="just">
               <a:buFont typeface="Arial" panose="020B0604020202020204" pitchFamily="34" charset="0"/>
               <a:buChar char="•"/>
             </a:pPr>
             <a:r>
-              <a:rPr lang="en-IN" sz="1600" b="1" dirty="0"/>
+              <a:rPr lang="en-IN" sz="1600" b="1" dirty="0">
+                <a:latin typeface="Times New Roman" panose="02020603050405020304" pitchFamily="18" charset="0"/>
+                <a:cs typeface="Times New Roman" panose="02020603050405020304" pitchFamily="18" charset="0"/>
+              </a:rPr>
               <a:t>Explainable AI-Driven Insights</a:t>
             </a:r>
             <a:r>
-              <a:rPr lang="en-IN" sz="1600" dirty="0"/>
+              <a:rPr lang="en-IN" sz="1600" dirty="0">
+                <a:latin typeface="Times New Roman" panose="02020603050405020304" pitchFamily="18" charset="0"/>
+                <a:cs typeface="Times New Roman" panose="02020603050405020304" pitchFamily="18" charset="0"/>
+              </a:rPr>
               <a:t> – Provides transparent recommendations supported by citation networks, trend analyses, and evidence from retrieved publications.</a:t>
             </a:r>
           </a:p>
           <a:p>
-            <a:pPr marL="285750" indent="-285750">
+            <a:pPr marL="285750" indent="-285750" algn="just">
               <a:buFont typeface="Arial" panose="020B0604020202020204" pitchFamily="34" charset="0"/>
               <a:buChar char="•"/>
             </a:pPr>
             <a:r>
-              <a:rPr lang="en-IN" sz="1600" b="1" dirty="0"/>
+              <a:rPr lang="en-IN" sz="1600" b="1" dirty="0">
+                <a:latin typeface="Times New Roman" panose="02020603050405020304" pitchFamily="18" charset="0"/>
+                <a:cs typeface="Times New Roman" panose="02020603050405020304" pitchFamily="18" charset="0"/>
+              </a:rPr>
               <a:t>Continuous Learning Framework</a:t>
             </a:r>
             <a:r>
-              <a:rPr lang="en-IN" sz="1600" dirty="0"/>
+              <a:rPr lang="en-IN" sz="1600" dirty="0">
+                <a:latin typeface="Times New Roman" panose="02020603050405020304" pitchFamily="18" charset="0"/>
+                <a:cs typeface="Times New Roman" panose="02020603050405020304" pitchFamily="18" charset="0"/>
+              </a:rPr>
               <a:t> – Incorporates newly published papers and user feedback to maintain an up-to-date and evolving research ecosystem.</a:t>
             </a:r>
           </a:p>
           <a:p>
-            <a:pPr marL="285750" indent="-285750">
+            <a:pPr marL="285750" indent="-285750" algn="just">
               <a:buFont typeface="Arial" panose="020B0604020202020204" pitchFamily="34" charset="0"/>
               <a:buChar char="•"/>
             </a:pPr>
             <a:r>
-              <a:rPr lang="en-IN" sz="1600" b="1" dirty="0"/>
+              <a:rPr lang="en-IN" sz="1600" b="1" dirty="0">
+                <a:latin typeface="Times New Roman" panose="02020603050405020304" pitchFamily="18" charset="0"/>
+                <a:cs typeface="Times New Roman" panose="02020603050405020304" pitchFamily="18" charset="0"/>
+              </a:rPr>
               <a:t>IBM-Powered Agentic Architecture</a:t>
             </a:r>
             <a:r>
-              <a:rPr lang="en-IN" sz="1600" dirty="0"/>
+              <a:rPr lang="en-IN" sz="1600" dirty="0">
+                <a:latin typeface="Times New Roman" panose="02020603050405020304" pitchFamily="18" charset="0"/>
+                <a:cs typeface="Times New Roman" panose="02020603050405020304" pitchFamily="18" charset="0"/>
+              </a:rPr>
               <a:t> – Leverages IBM </a:t>
             </a:r>
             <a:r>
-              <a:rPr lang="en-IN" sz="1600" dirty="0" err="1"/>
+              <a:rPr lang="en-IN" sz="1600" dirty="0" err="1">
+                <a:latin typeface="Times New Roman" panose="02020603050405020304" pitchFamily="18" charset="0"/>
+                <a:cs typeface="Times New Roman" panose="02020603050405020304" pitchFamily="18" charset="0"/>
+              </a:rPr>
               <a:t>Langflow</a:t>
             </a:r>
             <a:r>
-              <a:rPr lang="en-IN" sz="1600" dirty="0"/>
+              <a:rPr lang="en-IN" sz="1600" dirty="0">
+                <a:latin typeface="Times New Roman" panose="02020603050405020304" pitchFamily="18" charset="0"/>
+                <a:cs typeface="Times New Roman" panose="02020603050405020304" pitchFamily="18" charset="0"/>
+              </a:rPr>
               <a:t>, IBM Orchestrate, IBM Granite models, and </a:t>
             </a:r>
             <a:r>
-              <a:rPr lang="en-IN" sz="1600" dirty="0" err="1"/>
+              <a:rPr lang="en-IN" sz="1600" dirty="0" err="1">
+                <a:latin typeface="Times New Roman" panose="02020603050405020304" pitchFamily="18" charset="0"/>
+                <a:cs typeface="Times New Roman" panose="02020603050405020304" pitchFamily="18" charset="0"/>
+              </a:rPr>
               <a:t>Watsonx.ai</a:t>
             </a:r>
             <a:r>
-              <a:rPr lang="en-IN" sz="1600" dirty="0"/>
+              <a:rPr lang="en-IN" sz="1600" dirty="0">
+                <a:latin typeface="Times New Roman" panose="02020603050405020304" pitchFamily="18" charset="0"/>
+                <a:cs typeface="Times New Roman" panose="02020603050405020304" pitchFamily="18" charset="0"/>
+              </a:rPr>
               <a:t> to deliver a scalable, secure, and enterprise-ready research assistant.</a:t>
             </a:r>
           </a:p>
           <a:p>
-            <a:pPr marL="285750" indent="-285750">
+            <a:pPr marL="285750" indent="-285750" algn="just">
               <a:buFont typeface="Arial" panose="020B0604020202020204" pitchFamily="34" charset="0"/>
               <a:buChar char="•"/>
             </a:pPr>
             <a:r>
-              <a:rPr lang="en-IN" sz="1600" b="1" dirty="0"/>
+              <a:rPr lang="en-IN" sz="1600" b="1" dirty="0">
+                <a:latin typeface="Times New Roman" panose="02020603050405020304" pitchFamily="18" charset="0"/>
+                <a:cs typeface="Times New Roman" panose="02020603050405020304" pitchFamily="18" charset="0"/>
+              </a:rPr>
               <a:t>End-to-End Research Automation</a:t>
             </a:r>
             <a:r>
-              <a:rPr lang="en-IN" sz="1600" dirty="0"/>
+              <a:rPr lang="en-IN" sz="1600" dirty="0">
+                <a:latin typeface="Times New Roman" panose="02020603050405020304" pitchFamily="18" charset="0"/>
+                <a:cs typeface="Times New Roman" panose="02020603050405020304" pitchFamily="18" charset="0"/>
+              </a:rPr>
               <a:t> – Enables a complete research cycle: Search → Read → </a:t>
             </a:r>
             <a:r>
-              <a:rPr lang="en-IN" sz="1600" dirty="0" err="1"/>
+              <a:rPr lang="en-IN" sz="1600" dirty="0" err="1">
+                <a:latin typeface="Times New Roman" panose="02020603050405020304" pitchFamily="18" charset="0"/>
+                <a:cs typeface="Times New Roman" panose="02020603050405020304" pitchFamily="18" charset="0"/>
+              </a:rPr>
               <a:t>Analyze</a:t>
             </a:r>
             <a:r>
-              <a:rPr lang="en-IN" sz="1600" dirty="0"/>
+              <a:rPr lang="en-IN" sz="1600" dirty="0">
+                <a:latin typeface="Times New Roman" panose="02020603050405020304" pitchFamily="18" charset="0"/>
+                <a:cs typeface="Times New Roman" panose="02020603050405020304" pitchFamily="18" charset="0"/>
+              </a:rPr>
               <a:t> → Infer → Predict → Visualize, significantly reducing literature review effort and accelerating scientific discovery.</a:t>
             </a:r>
           </a:p>
@@ -12613,7 +12956,7 @@
 </p:sld>
 </file>
 
-<file path=ppt/slides/slide13.xml><?xml version="1.0" encoding="utf-8"?>
+<file path=ppt/slides/slide15.xml><?xml version="1.0" encoding="utf-8"?>
 <p:sld xmlns:a="http://schemas.openxmlformats.org/drawingml/2006/main" xmlns:r="http://schemas.openxmlformats.org/officeDocument/2006/relationships" xmlns:p="http://schemas.openxmlformats.org/presentationml/2006/main">
   <p:cSld>
     <p:spTree>
@@ -12686,11 +13029,15 @@
             </a:pPr>
             <a:r>
               <a:rPr lang="en-US" sz="2400" b="1" dirty="0">
+                <a:latin typeface="Times New Roman" panose="02020603050405020304" pitchFamily="18" charset="0"/>
+                <a:cs typeface="Times New Roman" panose="02020603050405020304" pitchFamily="18" charset="0"/>
                 <a:sym typeface="Times New Roman"/>
               </a:rPr>
               <a:t>Git Hub Link</a:t>
             </a:r>
             <a:endParaRPr sz="2400" b="1" dirty="0">
+              <a:latin typeface="Times New Roman" panose="02020603050405020304" pitchFamily="18" charset="0"/>
+              <a:cs typeface="Times New Roman" panose="02020603050405020304" pitchFamily="18" charset="0"/>
               <a:sym typeface="Times New Roman"/>
             </a:endParaRPr>
           </a:p>
@@ -12935,7 +13282,7 @@
 </p:sld>
 </file>
 
-<file path=ppt/slides/slide14.xml><?xml version="1.0" encoding="utf-8"?>
+<file path=ppt/slides/slide16.xml><?xml version="1.0" encoding="utf-8"?>
 <p:sld xmlns:a="http://schemas.openxmlformats.org/drawingml/2006/main" xmlns:r="http://schemas.openxmlformats.org/officeDocument/2006/relationships" xmlns:p="http://schemas.openxmlformats.org/presentationml/2006/main">
   <p:cSld>
     <p:spTree>
@@ -13007,12 +13354,16 @@
               <a:buNone/>
             </a:pPr>
             <a:r>
-              <a:rPr lang="en-US" sz="2400" b="1">
+              <a:rPr lang="en-US" sz="2400" b="1" dirty="0">
+                <a:latin typeface="Times New Roman" panose="02020603050405020304" pitchFamily="18" charset="0"/>
+                <a:cs typeface="Times New Roman" panose="02020603050405020304" pitchFamily="18" charset="0"/>
                 <a:sym typeface="Times New Roman"/>
               </a:rPr>
               <a:t>Future Scope </a:t>
             </a:r>
-            <a:endParaRPr sz="2400" b="1">
+            <a:endParaRPr sz="2400" b="1" dirty="0">
+              <a:latin typeface="Times New Roman" panose="02020603050405020304" pitchFamily="18" charset="0"/>
+              <a:cs typeface="Times New Roman" panose="02020603050405020304" pitchFamily="18" charset="0"/>
               <a:sym typeface="Times New Roman"/>
             </a:endParaRPr>
           </a:p>
@@ -13054,22 +13405,37 @@
               <a:buChar char="•"/>
             </a:pPr>
             <a:r>
-              <a:rPr lang="en-IN" sz="1800" b="1" dirty="0"/>
+              <a:rPr lang="en-IN" sz="1800" b="1" dirty="0">
+                <a:latin typeface="Times New Roman" panose="02020603050405020304" pitchFamily="18" charset="0"/>
+                <a:cs typeface="Times New Roman" panose="02020603050405020304" pitchFamily="18" charset="0"/>
+              </a:rPr>
               <a:t>Automated Manuscript and Grant Proposal Generation</a:t>
             </a:r>
             <a:br>
-              <a:rPr lang="en-IN" sz="1800" dirty="0"/>
+              <a:rPr lang="en-IN" sz="1800" dirty="0">
+                <a:latin typeface="Times New Roman" panose="02020603050405020304" pitchFamily="18" charset="0"/>
+                <a:cs typeface="Times New Roman" panose="02020603050405020304" pitchFamily="18" charset="0"/>
+              </a:rPr>
             </a:br>
             <a:r>
-              <a:rPr lang="en-IN" sz="1800" dirty="0"/>
+              <a:rPr lang="en-IN" sz="1800" dirty="0">
+                <a:latin typeface="Times New Roman" panose="02020603050405020304" pitchFamily="18" charset="0"/>
+                <a:cs typeface="Times New Roman" panose="02020603050405020304" pitchFamily="18" charset="0"/>
+              </a:rPr>
               <a:t>Enable </a:t>
             </a:r>
             <a:r>
-              <a:rPr lang="en-IN" sz="1800" dirty="0" err="1"/>
+              <a:rPr lang="en-IN" sz="1800" dirty="0" err="1">
+                <a:latin typeface="Times New Roman" panose="02020603050405020304" pitchFamily="18" charset="0"/>
+                <a:cs typeface="Times New Roman" panose="02020603050405020304" pitchFamily="18" charset="0"/>
+              </a:rPr>
               <a:t>ResearchMind</a:t>
             </a:r>
             <a:r>
-              <a:rPr lang="en-IN" sz="1800" dirty="0"/>
+              <a:rPr lang="en-IN" sz="1800" dirty="0">
+                <a:latin typeface="Times New Roman" panose="02020603050405020304" pitchFamily="18" charset="0"/>
+                <a:cs typeface="Times New Roman" panose="02020603050405020304" pitchFamily="18" charset="0"/>
+              </a:rPr>
               <a:t> AI to draft research papers, survey articles, and grant proposals by leveraging synthesized literature, identified research gaps, and user-provided experimental results. </a:t>
             </a:r>
           </a:p>
@@ -13079,14 +13445,23 @@
               <a:buChar char="•"/>
             </a:pPr>
             <a:r>
-              <a:rPr lang="en-IN" sz="1800" b="1" dirty="0"/>
+              <a:rPr lang="en-IN" sz="1800" b="1" dirty="0">
+                <a:latin typeface="Times New Roman" panose="02020603050405020304" pitchFamily="18" charset="0"/>
+                <a:cs typeface="Times New Roman" panose="02020603050405020304" pitchFamily="18" charset="0"/>
+              </a:rPr>
               <a:t>Collaborative Research Ecosystem</a:t>
             </a:r>
             <a:br>
-              <a:rPr lang="en-IN" sz="1800" dirty="0"/>
+              <a:rPr lang="en-IN" sz="1800" dirty="0">
+                <a:latin typeface="Times New Roman" panose="02020603050405020304" pitchFamily="18" charset="0"/>
+                <a:cs typeface="Times New Roman" panose="02020603050405020304" pitchFamily="18" charset="0"/>
+              </a:rPr>
             </a:br>
             <a:r>
-              <a:rPr lang="en-IN" sz="1800" dirty="0"/>
+              <a:rPr lang="en-IN" sz="1800" dirty="0">
+                <a:latin typeface="Times New Roman" panose="02020603050405020304" pitchFamily="18" charset="0"/>
+                <a:cs typeface="Times New Roman" panose="02020603050405020304" pitchFamily="18" charset="0"/>
+              </a:rPr>
               <a:t>Introduce multi-user workspaces where researchers can share literature collections, annotate papers, track project progress, and receive AI-driven collaboration recommendations based on complementary expertise. </a:t>
             </a:r>
           </a:p>
@@ -13096,14 +13471,23 @@
               <a:buChar char="•"/>
             </a:pPr>
             <a:r>
-              <a:rPr lang="en-IN" sz="1800" b="1" dirty="0"/>
+              <a:rPr lang="en-IN" sz="1800" b="1" dirty="0">
+                <a:latin typeface="Times New Roman" panose="02020603050405020304" pitchFamily="18" charset="0"/>
+                <a:cs typeface="Times New Roman" panose="02020603050405020304" pitchFamily="18" charset="0"/>
+              </a:rPr>
               <a:t>Experimental Design and Hypothesis Validation</a:t>
             </a:r>
             <a:br>
-              <a:rPr lang="en-IN" sz="1800" dirty="0"/>
+              <a:rPr lang="en-IN" sz="1800" dirty="0">
+                <a:latin typeface="Times New Roman" panose="02020603050405020304" pitchFamily="18" charset="0"/>
+                <a:cs typeface="Times New Roman" panose="02020603050405020304" pitchFamily="18" charset="0"/>
+              </a:rPr>
             </a:br>
             <a:r>
-              <a:rPr lang="en-IN" sz="1800" dirty="0"/>
+              <a:rPr lang="en-IN" sz="1800" dirty="0">
+                <a:latin typeface="Times New Roman" panose="02020603050405020304" pitchFamily="18" charset="0"/>
+                <a:cs typeface="Times New Roman" panose="02020603050405020304" pitchFamily="18" charset="0"/>
+              </a:rPr>
               <a:t>Extend the agent to suggest experimental methodologies, recommend suitable datasets and evaluation metrics, and simulate potential outcomes to help researchers validate hypotheses before conducting costly experiments.</a:t>
             </a:r>
           </a:p>
@@ -13195,7 +13579,7 @@
         </p:nvSpPr>
         <p:spPr>
           <a:xfrm>
-            <a:off x="1218724" y="5430713"/>
+            <a:off x="1228151" y="5430713"/>
             <a:ext cx="7468553" cy="383024"/>
           </a:xfrm>
           <a:prstGeom prst="rect">
@@ -13266,7 +13650,7 @@
 </p:sld>
 </file>
 
-<file path=ppt/slides/slide15.xml><?xml version="1.0" encoding="utf-8"?>
+<file path=ppt/slides/slide17.xml><?xml version="1.0" encoding="utf-8"?>
 <p:sld xmlns:a="http://schemas.openxmlformats.org/drawingml/2006/main" xmlns:r="http://schemas.openxmlformats.org/officeDocument/2006/relationships" xmlns:p="http://schemas.openxmlformats.org/presentationml/2006/main">
   <p:cSld>
     <p:spTree>
@@ -13298,7 +13682,7 @@
         <p:spPr>
           <a:xfrm>
             <a:off x="327949" y="207380"/>
-            <a:ext cx="6096000" cy="677108"/>
+            <a:ext cx="6096000" cy="461665"/>
           </a:xfrm>
           <a:prstGeom prst="rect">
             <a:avLst/>
@@ -13315,13 +13699,16 @@
           <a:lstStyle/>
           <a:p>
             <a:r>
-              <a:rPr lang="en-US" sz="2400" b="1"/>
-              <a:t>Certificates Earned:</a:t>
+              <a:rPr lang="en-US" sz="2400" b="1" dirty="0">
+                <a:latin typeface="Times New Roman" panose="02020603050405020304" pitchFamily="18" charset="0"/>
+                <a:cs typeface="Times New Roman" panose="02020603050405020304" pitchFamily="18" charset="0"/>
+              </a:rPr>
+              <a:t>Certificates Earned</a:t>
             </a:r>
-          </a:p>
-          <a:p>
-            <a:pPr algn="ctr"/>
-            <a:endParaRPr lang="en-US"/>
+            <a:endParaRPr lang="en-US" dirty="0">
+              <a:latin typeface="Times New Roman" panose="02020603050405020304" pitchFamily="18" charset="0"/>
+              <a:cs typeface="Times New Roman" panose="02020603050405020304" pitchFamily="18" charset="0"/>
+            </a:endParaRPr>
           </a:p>
         </p:txBody>
       </p:sp>
@@ -13368,7 +13755,7 @@
 </p:sld>
 </file>
 
-<file path=ppt/slides/slide16.xml><?xml version="1.0" encoding="utf-8"?>
+<file path=ppt/slides/slide18.xml><?xml version="1.0" encoding="utf-8"?>
 <p:sld xmlns:a="http://schemas.openxmlformats.org/drawingml/2006/main" xmlns:r="http://schemas.openxmlformats.org/officeDocument/2006/relationships" xmlns:p="http://schemas.openxmlformats.org/presentationml/2006/main">
   <p:cSld>
     <p:spTree>
@@ -13400,7 +13787,7 @@
         <p:spPr>
           <a:xfrm>
             <a:off x="176696" y="226391"/>
-            <a:ext cx="6096000" cy="677108"/>
+            <a:ext cx="6096000" cy="461665"/>
           </a:xfrm>
           <a:prstGeom prst="rect">
             <a:avLst/>
@@ -13417,30 +13804,19 @@
           <a:lstStyle/>
           <a:p>
             <a:r>
-              <a:rPr lang="en-US" sz="2400" b="1" i="0" u="none" strike="noStrike" baseline="0">
+              <a:rPr lang="en-US" sz="2400" b="1" i="0" u="none" strike="noStrike" baseline="0" dirty="0">
                 <a:solidFill>
                   <a:srgbClr val="000000"/>
                 </a:solidFill>
-                <a:latin typeface="Arial"/>
+                <a:latin typeface="Times New Roman" panose="02020603050405020304" pitchFamily="18" charset="0"/>
+                <a:cs typeface="Times New Roman" panose="02020603050405020304" pitchFamily="18" charset="0"/>
               </a:rPr>
-              <a:t>Certificates Earned:</a:t>
+              <a:t>Certificates Earned</a:t>
             </a:r>
-            <a:r>
-              <a:rPr sz="2400" b="0" i="0">
-                <a:solidFill>
-                  <a:srgbClr val="000000"/>
-                </a:solidFill>
-                <a:latin typeface="Arial"/>
-                <a:ea typeface="Arial"/>
-                <a:cs typeface="Arial"/>
-              </a:rPr>
-              <a:t>​</a:t>
-            </a:r>
-            <a:endParaRPr lang="en-US"/>
-          </a:p>
-          <a:p>
-            <a:pPr algn="ctr"/>
-            <a:endParaRPr lang="en-US"/>
+            <a:endParaRPr lang="en-US" dirty="0">
+              <a:latin typeface="Times New Roman" panose="02020603050405020304" pitchFamily="18" charset="0"/>
+              <a:cs typeface="Times New Roman" panose="02020603050405020304" pitchFamily="18" charset="0"/>
+            </a:endParaRPr>
           </a:p>
         </p:txBody>
       </p:sp>
@@ -13487,7 +13863,7 @@
 </p:sld>
 </file>
 
-<file path=ppt/slides/slide17.xml><?xml version="1.0" encoding="utf-8"?>
+<file path=ppt/slides/slide19.xml><?xml version="1.0" encoding="utf-8"?>
 <p:sld xmlns:a="http://schemas.openxmlformats.org/drawingml/2006/main" xmlns:r="http://schemas.openxmlformats.org/officeDocument/2006/relationships" xmlns:p="http://schemas.openxmlformats.org/presentationml/2006/main">
   <p:cSld>
     <p:spTree>
@@ -13671,7 +14047,7 @@
           <p:nvPr>
             <p:extLst>
               <p:ext uri="{D42A27DB-BD31-4B8C-83A1-F6EECF244321}">
-                <p14:modId xmlns:p14="http://schemas.microsoft.com/office/powerpoint/2010/main" val="508447541"/>
+                <p14:modId xmlns:p14="http://schemas.microsoft.com/office/powerpoint/2010/main" val="2542710713"/>
               </p:ext>
             </p:extLst>
           </p:nvPr>
@@ -13733,10 +14109,16 @@
                         <a:buNone/>
                       </a:pPr>
                       <a:r>
-                        <a:rPr lang="en-US" sz="1800" u="none" strike="noStrike" cap="none"/>
+                        <a:rPr lang="en-US" sz="2000" u="none" strike="noStrike" cap="none" dirty="0">
+                          <a:latin typeface="Times New Roman" panose="02020603050405020304" pitchFamily="18" charset="0"/>
+                          <a:cs typeface="Times New Roman" panose="02020603050405020304" pitchFamily="18" charset="0"/>
+                        </a:rPr>
                         <a:t>Student Name</a:t>
                       </a:r>
-                      <a:endParaRPr sz="1800" u="none" strike="noStrike" cap="none"/>
+                      <a:endParaRPr sz="2000" u="none" strike="noStrike" cap="none" dirty="0">
+                        <a:latin typeface="Times New Roman" panose="02020603050405020304" pitchFamily="18" charset="0"/>
+                        <a:cs typeface="Times New Roman" panose="02020603050405020304" pitchFamily="18" charset="0"/>
+                      </a:endParaRPr>
                     </a:p>
                   </a:txBody>
                   <a:tcPr marL="91450" marR="91450" marT="45725" marB="45725" anchor="ctr">
@@ -13796,10 +14178,16 @@
                         <a:buNone/>
                       </a:pPr>
                       <a:r>
-                        <a:rPr lang="en-US" sz="1800" u="none" strike="noStrike" cap="none"/>
+                        <a:rPr lang="en-US" sz="2000" u="none" strike="noStrike" cap="none" dirty="0">
+                          <a:latin typeface="Times New Roman" panose="02020603050405020304" pitchFamily="18" charset="0"/>
+                          <a:cs typeface="Times New Roman" panose="02020603050405020304" pitchFamily="18" charset="0"/>
+                        </a:rPr>
                         <a:t>Recent Passport Photo</a:t>
                       </a:r>
-                      <a:endParaRPr sz="1800" u="none" strike="noStrike" cap="none"/>
+                      <a:endParaRPr sz="2000" u="none" strike="noStrike" cap="none" dirty="0">
+                        <a:latin typeface="Times New Roman" panose="02020603050405020304" pitchFamily="18" charset="0"/>
+                        <a:cs typeface="Times New Roman" panose="02020603050405020304" pitchFamily="18" charset="0"/>
+                      </a:endParaRPr>
                     </a:p>
                   </a:txBody>
                   <a:tcPr marL="91450" marR="91450" marT="45725" marB="45725" anchor="ctr">
@@ -13867,23 +14255,23 @@
                         <a:buNone/>
                       </a:pPr>
                       <a:r>
-                        <a:rPr lang="en-US" sz="1800" b="0" i="0" u="none" strike="noStrike" cap="none">
+                        <a:rPr lang="en-US" sz="2000" b="0" i="0" u="none" strike="noStrike" cap="none">
                           <a:solidFill>
                             <a:srgbClr val="000000"/>
                           </a:solidFill>
-                          <a:latin typeface="Arial"/>
+                          <a:latin typeface="Times New Roman" panose="02020603050405020304" pitchFamily="18" charset="0"/>
                           <a:ea typeface="Calibri"/>
-                          <a:cs typeface="Arial"/>
+                          <a:cs typeface="Times New Roman" panose="02020603050405020304" pitchFamily="18" charset="0"/>
                           <a:sym typeface="Calibri"/>
                         </a:rPr>
                         <a:t>Email ID </a:t>
                       </a:r>
-                      <a:endParaRPr sz="1800" b="0" i="0" u="none" strike="noStrike" cap="none">
+                      <a:endParaRPr sz="2000" b="0" i="0" u="none" strike="noStrike" cap="none">
                         <a:solidFill>
                           <a:srgbClr val="000000"/>
                         </a:solidFill>
-                        <a:latin typeface="Arial"/>
-                        <a:cs typeface="Arial"/>
+                        <a:latin typeface="Times New Roman" panose="02020603050405020304" pitchFamily="18" charset="0"/>
+                        <a:cs typeface="Times New Roman" panose="02020603050405020304" pitchFamily="18" charset="0"/>
                         <a:sym typeface="Arial"/>
                       </a:endParaRPr>
                     </a:p>
@@ -13953,23 +14341,23 @@
                         <a:buNone/>
                       </a:pPr>
                       <a:r>
-                        <a:rPr lang="en-US" sz="1800" b="0" i="0" u="none" strike="noStrike" cap="none">
+                        <a:rPr lang="en-US" sz="2000" b="0" i="0" u="none" strike="noStrike" cap="none">
                           <a:solidFill>
                             <a:srgbClr val="000000"/>
                           </a:solidFill>
-                          <a:latin typeface="Arial"/>
+                          <a:latin typeface="Times New Roman" panose="02020603050405020304" pitchFamily="18" charset="0"/>
                           <a:ea typeface="Calibri"/>
-                          <a:cs typeface="Arial"/>
+                          <a:cs typeface="Times New Roman" panose="02020603050405020304" pitchFamily="18" charset="0"/>
                           <a:sym typeface="Calibri"/>
                         </a:rPr>
                         <a:t>Mobile number</a:t>
                       </a:r>
-                      <a:endParaRPr sz="1800" b="0" i="0" u="none" strike="noStrike" cap="none">
+                      <a:endParaRPr sz="2000" b="0" i="0" u="none" strike="noStrike" cap="none">
                         <a:solidFill>
                           <a:srgbClr val="000000"/>
                         </a:solidFill>
-                        <a:latin typeface="Arial"/>
-                        <a:cs typeface="Arial"/>
+                        <a:latin typeface="Times New Roman" panose="02020603050405020304" pitchFamily="18" charset="0"/>
+                        <a:cs typeface="Times New Roman" panose="02020603050405020304" pitchFamily="18" charset="0"/>
                         <a:sym typeface="Arial"/>
                       </a:endParaRPr>
                     </a:p>
@@ -13992,23 +14380,23 @@
                         <a:buNone/>
                       </a:pPr>
                       <a:r>
-                        <a:rPr lang="en-US" sz="1800" b="0" i="0" u="none" strike="noStrike" cap="none">
+                        <a:rPr lang="en-US" sz="2000" b="0" i="0" u="none" strike="noStrike" cap="none">
                           <a:solidFill>
                             <a:srgbClr val="000000"/>
                           </a:solidFill>
-                          <a:latin typeface="Arial"/>
+                          <a:latin typeface="Times New Roman" panose="02020603050405020304" pitchFamily="18" charset="0"/>
                           <a:ea typeface="Calibri"/>
-                          <a:cs typeface="Arial"/>
+                          <a:cs typeface="Times New Roman" panose="02020603050405020304" pitchFamily="18" charset="0"/>
                           <a:sym typeface="Calibri"/>
                         </a:rPr>
                         <a:t>[WhatsApp] </a:t>
                       </a:r>
-                      <a:endParaRPr sz="1800" b="0" i="0" u="none" strike="noStrike" cap="none">
+                      <a:endParaRPr sz="2000" b="0" i="0" u="none" strike="noStrike" cap="none">
                         <a:solidFill>
                           <a:srgbClr val="000000"/>
                         </a:solidFill>
-                        <a:latin typeface="Arial"/>
-                        <a:cs typeface="Arial"/>
+                        <a:latin typeface="Times New Roman" panose="02020603050405020304" pitchFamily="18" charset="0"/>
+                        <a:cs typeface="Times New Roman" panose="02020603050405020304" pitchFamily="18" charset="0"/>
                         <a:sym typeface="Arial"/>
                       </a:endParaRPr>
                     </a:p>
@@ -14077,10 +14465,16 @@
                         <a:buNone/>
                       </a:pPr>
                       <a:r>
-                        <a:rPr lang="en-IN" dirty="0"/>
+                        <a:rPr lang="en-IN" sz="1600" dirty="0">
+                          <a:latin typeface="Times New Roman" panose="02020603050405020304" pitchFamily="18" charset="0"/>
+                          <a:cs typeface="Times New Roman" panose="02020603050405020304" pitchFamily="18" charset="0"/>
+                        </a:rPr>
                         <a:t>Dr. Rishav Dutta</a:t>
                       </a:r>
-                      <a:endParaRPr dirty="0"/>
+                      <a:endParaRPr sz="1600" dirty="0">
+                        <a:latin typeface="Times New Roman" panose="02020603050405020304" pitchFamily="18" charset="0"/>
+                        <a:cs typeface="Times New Roman" panose="02020603050405020304" pitchFamily="18" charset="0"/>
+                      </a:endParaRPr>
                     </a:p>
                   </a:txBody>
                   <a:tcPr marL="91450" marR="91450" marT="45725" marB="45725" anchor="ctr">
@@ -14139,7 +14533,10 @@
                         </a:spcAft>
                         <a:buNone/>
                       </a:pPr>
-                      <a:endParaRPr sz="1800" dirty="0"/>
+                      <a:endParaRPr sz="2000" dirty="0">
+                        <a:latin typeface="Times New Roman" panose="02020603050405020304" pitchFamily="18" charset="0"/>
+                        <a:cs typeface="Times New Roman" panose="02020603050405020304" pitchFamily="18" charset="0"/>
+                      </a:endParaRPr>
                     </a:p>
                   </a:txBody>
                   <a:tcPr marL="91450" marR="91450" marT="45725" marB="45725" anchor="ctr">
@@ -14199,12 +14596,17 @@
                         <a:buNone/>
                       </a:pPr>
                       <a:r>
-                        <a:rPr lang="en-IN" dirty="0" err="1">
+                        <a:rPr lang="en-IN" sz="1600" dirty="0" err="1">
+                          <a:latin typeface="Times New Roman" panose="02020603050405020304" pitchFamily="18" charset="0"/>
+                          <a:cs typeface="Times New Roman" panose="02020603050405020304" pitchFamily="18" charset="0"/>
                           <a:hlinkClick r:id="rId3"/>
                         </a:rPr>
                         <a:t>rdutta@iujaipur.edu.in</a:t>
                       </a:r>
-                      <a:endParaRPr dirty="0"/>
+                      <a:endParaRPr sz="1600" dirty="0">
+                        <a:latin typeface="Times New Roman" panose="02020603050405020304" pitchFamily="18" charset="0"/>
+                        <a:cs typeface="Times New Roman" panose="02020603050405020304" pitchFamily="18" charset="0"/>
+                      </a:endParaRPr>
                     </a:p>
                   </a:txBody>
                   <a:tcPr marL="91450" marR="91450" marT="45725" marB="45725" anchor="ctr">
@@ -14264,10 +14666,16 @@
                         <a:buNone/>
                       </a:pPr>
                       <a:r>
-                        <a:rPr lang="en-IN" dirty="0"/>
+                        <a:rPr lang="en-IN" sz="1600" dirty="0">
+                          <a:latin typeface="Times New Roman" panose="02020603050405020304" pitchFamily="18" charset="0"/>
+                          <a:cs typeface="Times New Roman" panose="02020603050405020304" pitchFamily="18" charset="0"/>
+                        </a:rPr>
                         <a:t>8617753998</a:t>
                       </a:r>
-                      <a:endParaRPr dirty="0"/>
+                      <a:endParaRPr sz="1600" dirty="0">
+                        <a:latin typeface="Times New Roman" panose="02020603050405020304" pitchFamily="18" charset="0"/>
+                        <a:cs typeface="Times New Roman" panose="02020603050405020304" pitchFamily="18" charset="0"/>
+                      </a:endParaRPr>
                     </a:p>
                   </a:txBody>
                   <a:tcPr marL="91450" marR="91450" marT="45725" marB="45725" anchor="ctr">
@@ -14401,16 +14809,12 @@
               <a:t>Project Tile – </a:t>
             </a:r>
             <a:r>
-              <a:rPr lang="en-IN" sz="2000" b="1" dirty="0">
+              <a:rPr lang="en-IN" sz="2400" b="1" dirty="0">
                 <a:latin typeface="+mj-lt"/>
                 <a:cs typeface="Times New Roman" panose="02020603050405020304" pitchFamily="18" charset="0"/>
               </a:rPr>
               <a:t>Research Agent</a:t>
             </a:r>
-            <a:endParaRPr lang="en-IN" sz="2400" b="1" dirty="0">
-              <a:latin typeface="+mj-lt"/>
-              <a:cs typeface="Times New Roman" panose="02020603050405020304" pitchFamily="18" charset="0"/>
-            </a:endParaRPr>
           </a:p>
         </p:txBody>
       </p:sp>
@@ -14490,7 +14894,7 @@
         <p:spPr>
           <a:xfrm>
             <a:off x="576072" y="1234440"/>
-            <a:ext cx="10607040" cy="4708981"/>
+            <a:ext cx="10607040" cy="4401205"/>
           </a:xfrm>
           <a:prstGeom prst="rect">
             <a:avLst/>
@@ -14503,89 +14907,150 @@
           </a:bodyPr>
           <a:lstStyle/>
           <a:p>
-            <a:pPr fontAlgn="base"/>
+            <a:pPr algn="just" fontAlgn="base"/>
             <a:r>
-              <a:rPr lang="en-US" sz="2000" b="1" dirty="0"/>
+              <a:rPr lang="en-US" sz="2000" b="1" dirty="0">
+                <a:latin typeface="Times New Roman" panose="02020603050405020304" pitchFamily="18" charset="0"/>
+                <a:cs typeface="Times New Roman" panose="02020603050405020304" pitchFamily="18" charset="0"/>
+              </a:rPr>
               <a:t>Problem Statement : Research Agent</a:t>
             </a:r>
             <a:r>
-              <a:rPr lang="en-US" sz="2000" dirty="0"/>
+              <a:rPr lang="en-US" sz="2000" dirty="0">
+                <a:latin typeface="Times New Roman" panose="02020603050405020304" pitchFamily="18" charset="0"/>
+                <a:cs typeface="Times New Roman" panose="02020603050405020304" pitchFamily="18" charset="0"/>
+              </a:rPr>
               <a:t> </a:t>
             </a:r>
           </a:p>
           <a:p>
-            <a:pPr fontAlgn="base"/>
-            <a:endParaRPr lang="en-US" sz="2000" b="1" dirty="0"/>
+            <a:pPr algn="just" fontAlgn="base"/>
+            <a:endParaRPr lang="en-US" sz="2000" b="1" dirty="0">
+              <a:latin typeface="Times New Roman" panose="02020603050405020304" pitchFamily="18" charset="0"/>
+              <a:cs typeface="Times New Roman" panose="02020603050405020304" pitchFamily="18" charset="0"/>
+            </a:endParaRPr>
           </a:p>
           <a:p>
+            <a:pPr algn="just"/>
             <a:r>
-              <a:rPr lang="en-IN" sz="2000" b="1" dirty="0"/>
+              <a:rPr lang="en-IN" sz="2000" b="1" dirty="0">
+                <a:latin typeface="Times New Roman" panose="02020603050405020304" pitchFamily="18" charset="0"/>
+                <a:cs typeface="Times New Roman" panose="02020603050405020304" pitchFamily="18" charset="0"/>
+              </a:rPr>
               <a:t>The Challenge</a:t>
             </a:r>
-            <a:endParaRPr lang="en-IN" sz="2000" dirty="0"/>
+            <a:endParaRPr lang="en-IN" sz="2000" dirty="0">
+              <a:latin typeface="Times New Roman" panose="02020603050405020304" pitchFamily="18" charset="0"/>
+              <a:cs typeface="Times New Roman" panose="02020603050405020304" pitchFamily="18" charset="0"/>
+            </a:endParaRPr>
           </a:p>
           <a:p>
+            <a:pPr algn="just"/>
             <a:r>
-              <a:rPr lang="en-IN" sz="2000" dirty="0"/>
+              <a:rPr lang="en-IN" sz="2000" dirty="0">
+                <a:latin typeface="Times New Roman" panose="02020603050405020304" pitchFamily="18" charset="0"/>
+                <a:cs typeface="Times New Roman" panose="02020603050405020304" pitchFamily="18" charset="0"/>
+              </a:rPr>
               <a:t>Researchers, students, and professionals often deal with scattered academic papers, technical articles, and experimental data spread across multiple platforms. Filtering relevant knowledge, summarizing insights, and keeping track of the latest developments is time-consuming and inefficient. The challenge is not just to collect references but to </a:t>
             </a:r>
             <a:r>
-              <a:rPr lang="en-IN" sz="2000" b="1" dirty="0"/>
+              <a:rPr lang="en-IN" sz="2000" b="1" dirty="0">
+                <a:latin typeface="Times New Roman" panose="02020603050405020304" pitchFamily="18" charset="0"/>
+                <a:cs typeface="Times New Roman" panose="02020603050405020304" pitchFamily="18" charset="0"/>
+              </a:rPr>
               <a:t>synthesize, </a:t>
             </a:r>
             <a:r>
-              <a:rPr lang="en-IN" sz="2000" b="1" dirty="0" err="1"/>
+              <a:rPr lang="en-IN" sz="2000" b="1" dirty="0" err="1">
+                <a:latin typeface="Times New Roman" panose="02020603050405020304" pitchFamily="18" charset="0"/>
+                <a:cs typeface="Times New Roman" panose="02020603050405020304" pitchFamily="18" charset="0"/>
+              </a:rPr>
               <a:t>analyze</a:t>
             </a:r>
             <a:r>
-              <a:rPr lang="en-IN" sz="2000" b="1" dirty="0"/>
+              <a:rPr lang="en-IN" sz="2000" b="1" dirty="0">
+                <a:latin typeface="Times New Roman" panose="02020603050405020304" pitchFamily="18" charset="0"/>
+                <a:cs typeface="Times New Roman" panose="02020603050405020304" pitchFamily="18" charset="0"/>
+              </a:rPr>
               <a:t>, and generate actionable research insights</a:t>
             </a:r>
             <a:r>
-              <a:rPr lang="en-IN" sz="2000" dirty="0"/>
+              <a:rPr lang="en-IN" sz="2000" dirty="0">
+                <a:latin typeface="Times New Roman" panose="02020603050405020304" pitchFamily="18" charset="0"/>
+                <a:cs typeface="Times New Roman" panose="02020603050405020304" pitchFamily="18" charset="0"/>
+              </a:rPr>
               <a:t> in real time.</a:t>
             </a:r>
           </a:p>
           <a:p>
+            <a:pPr algn="just"/>
             <a:r>
-              <a:rPr lang="en-IN" sz="2000" b="1" dirty="0"/>
+              <a:rPr lang="en-IN" sz="2000" b="1" dirty="0">
+                <a:latin typeface="Times New Roman" panose="02020603050405020304" pitchFamily="18" charset="0"/>
+                <a:cs typeface="Times New Roman" panose="02020603050405020304" pitchFamily="18" charset="0"/>
+              </a:rPr>
               <a:t>The Objective</a:t>
             </a:r>
-            <a:endParaRPr lang="en-IN" sz="2000" dirty="0"/>
+            <a:endParaRPr lang="en-IN" sz="2000" dirty="0">
+              <a:latin typeface="Times New Roman" panose="02020603050405020304" pitchFamily="18" charset="0"/>
+              <a:cs typeface="Times New Roman" panose="02020603050405020304" pitchFamily="18" charset="0"/>
+            </a:endParaRPr>
           </a:p>
           <a:p>
+            <a:pPr algn="just"/>
             <a:r>
-              <a:rPr lang="en-IN" sz="2000" dirty="0"/>
+              <a:rPr lang="en-IN" sz="2000" dirty="0">
+                <a:latin typeface="Times New Roman" panose="02020603050405020304" pitchFamily="18" charset="0"/>
+                <a:cs typeface="Times New Roman" panose="02020603050405020304" pitchFamily="18" charset="0"/>
+              </a:rPr>
               <a:t>Build an </a:t>
             </a:r>
             <a:r>
-              <a:rPr lang="en-IN" sz="2000" b="1" dirty="0"/>
+              <a:rPr lang="en-IN" sz="2000" b="1" dirty="0">
+                <a:latin typeface="Times New Roman" panose="02020603050405020304" pitchFamily="18" charset="0"/>
+                <a:cs typeface="Times New Roman" panose="02020603050405020304" pitchFamily="18" charset="0"/>
+              </a:rPr>
               <a:t>agentic AI application</a:t>
             </a:r>
             <a:r>
-              <a:rPr lang="en-IN" sz="2000" dirty="0"/>
+              <a:rPr lang="en-IN" sz="2000" dirty="0">
+                <a:latin typeface="Times New Roman" panose="02020603050405020304" pitchFamily="18" charset="0"/>
+                <a:cs typeface="Times New Roman" panose="02020603050405020304" pitchFamily="18" charset="0"/>
+              </a:rPr>
               <a:t> that acts as an intelligent research companion. The solution should:</a:t>
             </a:r>
           </a:p>
           <a:p>
-            <a:pPr lvl="0"/>
+            <a:pPr lvl="0" algn="just"/>
             <a:r>
-              <a:rPr lang="en-IN" sz="2000" b="1" dirty="0"/>
+              <a:rPr lang="en-IN" sz="2000" b="1" dirty="0">
+                <a:latin typeface="Times New Roman" panose="02020603050405020304" pitchFamily="18" charset="0"/>
+                <a:cs typeface="Times New Roman" panose="02020603050405020304" pitchFamily="18" charset="0"/>
+              </a:rPr>
               <a:t>Fuse Academic Sources:</a:t>
             </a:r>
             <a:r>
-              <a:rPr lang="en-IN" sz="2000" dirty="0"/>
+              <a:rPr lang="en-IN" sz="2000" dirty="0">
+                <a:latin typeface="Times New Roman" panose="02020603050405020304" pitchFamily="18" charset="0"/>
+                <a:cs typeface="Times New Roman" panose="02020603050405020304" pitchFamily="18" charset="0"/>
+              </a:rPr>
               <a:t> Aggregate data from research papers, journals, preprints, and knowledge repositories, then synthesize them into clear, concise literature reviews.</a:t>
             </a:r>
           </a:p>
           <a:p>
-            <a:pPr lvl="0"/>
+            <a:pPr lvl="0" algn="just"/>
             <a:r>
-              <a:rPr lang="en-IN" sz="2000" b="1" dirty="0"/>
+              <a:rPr lang="en-IN" sz="2000" b="1" dirty="0">
+                <a:latin typeface="Times New Roman" panose="02020603050405020304" pitchFamily="18" charset="0"/>
+                <a:cs typeface="Times New Roman" panose="02020603050405020304" pitchFamily="18" charset="0"/>
+              </a:rPr>
               <a:t>Enable Multimodal Research Input:</a:t>
             </a:r>
             <a:r>
-              <a:rPr lang="en-IN" sz="2000" dirty="0"/>
+              <a:rPr lang="en-IN" sz="2000" dirty="0">
+                <a:latin typeface="Times New Roman" panose="02020603050405020304" pitchFamily="18" charset="0"/>
+                <a:cs typeface="Times New Roman" panose="02020603050405020304" pitchFamily="18" charset="0"/>
+              </a:rPr>
               <a:t> Accept user queries, notes, charts, or even PDFs, and convert them into structured insights, references, and summaries.</a:t>
             </a:r>
           </a:p>
@@ -14620,10 +15085,16 @@
           <a:lstStyle/>
           <a:p>
             <a:r>
-              <a:rPr lang="en-US" sz="2400" b="1"/>
+              <a:rPr lang="en-US" sz="2400" b="1" dirty="0">
+                <a:latin typeface="Times New Roman" panose="02020603050405020304" pitchFamily="18" charset="0"/>
+                <a:cs typeface="Times New Roman" panose="02020603050405020304" pitchFamily="18" charset="0"/>
+              </a:rPr>
               <a:t>Problem Statement -</a:t>
             </a:r>
-            <a:endParaRPr lang="en-IN" sz="2400" b="1"/>
+            <a:endParaRPr lang="en-IN" sz="2400" b="1" dirty="0">
+              <a:latin typeface="Times New Roman" panose="02020603050405020304" pitchFamily="18" charset="0"/>
+              <a:cs typeface="Times New Roman" panose="02020603050405020304" pitchFamily="18" charset="0"/>
+            </a:endParaRPr>
           </a:p>
         </p:txBody>
       </p:sp>
@@ -14671,8 +15142,8 @@
         </p:nvSpPr>
         <p:spPr>
           <a:xfrm>
-            <a:off x="1114719" y="779456"/>
-            <a:ext cx="9867508" cy="1938992"/>
+            <a:off x="707010" y="779456"/>
+            <a:ext cx="10275217" cy="1938992"/>
           </a:xfrm>
           <a:prstGeom prst="rect">
             <a:avLst/>
@@ -14687,44 +15158,71 @@
           <a:p>
             <a:pPr lvl="0"/>
             <a:r>
-              <a:rPr lang="en-IN" sz="2000" b="1" dirty="0"/>
+              <a:rPr lang="en-IN" sz="2000" b="1" dirty="0">
+                <a:latin typeface="Times New Roman" panose="02020603050405020304" pitchFamily="18" charset="0"/>
+                <a:cs typeface="Times New Roman" panose="02020603050405020304" pitchFamily="18" charset="0"/>
+              </a:rPr>
               <a:t>Create a Predictive &amp; Agentic Layer:</a:t>
             </a:r>
             <a:r>
-              <a:rPr lang="en-IN" sz="2000" dirty="0"/>
+              <a:rPr lang="en-IN" sz="2000" dirty="0">
+                <a:latin typeface="Times New Roman" panose="02020603050405020304" pitchFamily="18" charset="0"/>
+                <a:cs typeface="Times New Roman" panose="02020603050405020304" pitchFamily="18" charset="0"/>
+              </a:rPr>
               <a:t> Highlight emerging trends, detect citation gaps, and predict promising directions for future research in a given domain.</a:t>
             </a:r>
           </a:p>
           <a:p>
             <a:pPr lvl="0"/>
             <a:r>
-              <a:rPr lang="en-IN" sz="2000" b="1" dirty="0"/>
+              <a:rPr lang="en-IN" sz="2000" b="1" dirty="0">
+                <a:latin typeface="Times New Roman" panose="02020603050405020304" pitchFamily="18" charset="0"/>
+                <a:cs typeface="Times New Roman" panose="02020603050405020304" pitchFamily="18" charset="0"/>
+              </a:rPr>
               <a:t>Visualize Research Insights:</a:t>
             </a:r>
             <a:r>
-              <a:rPr lang="en-IN" sz="2000" dirty="0"/>
+              <a:rPr lang="en-IN" sz="2000" dirty="0">
+                <a:latin typeface="Times New Roman" panose="02020603050405020304" pitchFamily="18" charset="0"/>
+                <a:cs typeface="Times New Roman" panose="02020603050405020304" pitchFamily="18" charset="0"/>
+              </a:rPr>
               <a:t> Provide an interactive dashboard with topic clusters, citation maps, sentiment/trend analysis, and concise knowledge graphs.</a:t>
             </a:r>
           </a:p>
           <a:p>
             <a:r>
-              <a:rPr lang="en-IN" sz="2000" b="1" dirty="0"/>
+              <a:rPr lang="en-IN" sz="2000" b="1" dirty="0">
+                <a:latin typeface="Times New Roman" panose="02020603050405020304" pitchFamily="18" charset="0"/>
+                <a:cs typeface="Times New Roman" panose="02020603050405020304" pitchFamily="18" charset="0"/>
+              </a:rPr>
               <a:t>Tech Stack (Mandatory)</a:t>
             </a:r>
-            <a:endParaRPr lang="en-IN" sz="2000" dirty="0"/>
+            <a:endParaRPr lang="en-IN" sz="2000" dirty="0">
+              <a:latin typeface="Times New Roman" panose="02020603050405020304" pitchFamily="18" charset="0"/>
+              <a:cs typeface="Times New Roman" panose="02020603050405020304" pitchFamily="18" charset="0"/>
+            </a:endParaRPr>
           </a:p>
           <a:p>
             <a:pPr lvl="0"/>
             <a:r>
-              <a:rPr lang="en-IN" sz="2000" dirty="0"/>
+              <a:rPr lang="en-IN" sz="2000" dirty="0">
+                <a:latin typeface="Times New Roman" panose="02020603050405020304" pitchFamily="18" charset="0"/>
+                <a:cs typeface="Times New Roman" panose="02020603050405020304" pitchFamily="18" charset="0"/>
+              </a:rPr>
               <a:t>IBM </a:t>
             </a:r>
             <a:r>
-              <a:rPr lang="en-IN" sz="2000" dirty="0" err="1"/>
+              <a:rPr lang="en-IN" sz="2000" dirty="0" err="1">
+                <a:latin typeface="Times New Roman" panose="02020603050405020304" pitchFamily="18" charset="0"/>
+                <a:cs typeface="Times New Roman" panose="02020603050405020304" pitchFamily="18" charset="0"/>
+              </a:rPr>
               <a:t>Langflow</a:t>
             </a:r>
             <a:r>
-              <a:rPr lang="en-IN" sz="2000" dirty="0"/>
+              <a:rPr lang="en-IN" sz="2000" dirty="0">
+                <a:latin typeface="Times New Roman" panose="02020603050405020304" pitchFamily="18" charset="0"/>
+                <a:cs typeface="Times New Roman" panose="02020603050405020304" pitchFamily="18" charset="0"/>
+              </a:rPr>
               <a:t> / IBM Orchestrate + IBM Models</a:t>
             </a:r>
           </a:p>
@@ -14795,109 +15293,173 @@
           <a:lstStyle/>
           <a:p>
             <a:r>
-              <a:rPr lang="en-IN" sz="2000" b="1" dirty="0"/>
+              <a:rPr lang="en-IN" sz="2000" b="1" dirty="0">
+                <a:latin typeface="Times New Roman" panose="02020603050405020304" pitchFamily="18" charset="0"/>
+                <a:cs typeface="Times New Roman" panose="02020603050405020304" pitchFamily="18" charset="0"/>
+              </a:rPr>
               <a:t>Objective</a:t>
             </a:r>
-            <a:br>
-              <a:rPr lang="en-IN" sz="2000" dirty="0"/>
-            </a:br>
+          </a:p>
+          <a:p>
+            <a:pPr algn="just"/>
             <a:r>
-              <a:rPr lang="en-IN" sz="2000" dirty="0"/>
+              <a:rPr lang="en-IN" sz="2000" dirty="0">
+                <a:latin typeface="Times New Roman" panose="02020603050405020304" pitchFamily="18" charset="0"/>
+                <a:cs typeface="Times New Roman" panose="02020603050405020304" pitchFamily="18" charset="0"/>
+              </a:rPr>
               <a:t>Develop an agentic AI assistant that autonomously discovers, </a:t>
             </a:r>
             <a:r>
-              <a:rPr lang="en-IN" sz="2000" dirty="0" err="1"/>
+              <a:rPr lang="en-IN" sz="2000" dirty="0" err="1">
+                <a:latin typeface="Times New Roman" panose="02020603050405020304" pitchFamily="18" charset="0"/>
+                <a:cs typeface="Times New Roman" panose="02020603050405020304" pitchFamily="18" charset="0"/>
+              </a:rPr>
               <a:t>analyzes</a:t>
             </a:r>
             <a:r>
-              <a:rPr lang="en-IN" sz="2000" dirty="0"/>
+              <a:rPr lang="en-IN" sz="2000" dirty="0">
+                <a:latin typeface="Times New Roman" panose="02020603050405020304" pitchFamily="18" charset="0"/>
+                <a:cs typeface="Times New Roman" panose="02020603050405020304" pitchFamily="18" charset="0"/>
+              </a:rPr>
               <a:t>, and synthesizes scientific knowledge from diverse sources.</a:t>
             </a:r>
           </a:p>
           <a:p>
+            <a:pPr algn="just"/>
             <a:r>
-              <a:rPr lang="en-IN" sz="2000" b="1" dirty="0"/>
+              <a:rPr lang="en-IN" sz="2000" b="1" dirty="0">
+                <a:latin typeface="Times New Roman" panose="02020603050405020304" pitchFamily="18" charset="0"/>
+                <a:cs typeface="Times New Roman" panose="02020603050405020304" pitchFamily="18" charset="0"/>
+              </a:rPr>
               <a:t>Key Features</a:t>
             </a:r>
-            <a:endParaRPr lang="en-IN" sz="2000" dirty="0"/>
+            <a:endParaRPr lang="en-IN" sz="2000" dirty="0">
+              <a:latin typeface="Times New Roman" panose="02020603050405020304" pitchFamily="18" charset="0"/>
+              <a:cs typeface="Times New Roman" panose="02020603050405020304" pitchFamily="18" charset="0"/>
+            </a:endParaRPr>
           </a:p>
           <a:p>
+            <a:pPr algn="just"/>
             <a:r>
-              <a:rPr lang="en-IN" sz="2000" b="1" dirty="0"/>
+              <a:rPr lang="en-IN" sz="2000" b="1" dirty="0">
+                <a:latin typeface="Times New Roman" panose="02020603050405020304" pitchFamily="18" charset="0"/>
+                <a:cs typeface="Times New Roman" panose="02020603050405020304" pitchFamily="18" charset="0"/>
+              </a:rPr>
               <a:t>Literature Fusion</a:t>
             </a:r>
             <a:r>
-              <a:rPr lang="en-IN" sz="2000" dirty="0"/>
+              <a:rPr lang="en-IN" sz="2000" dirty="0">
+                <a:latin typeface="Times New Roman" panose="02020603050405020304" pitchFamily="18" charset="0"/>
+                <a:cs typeface="Times New Roman" panose="02020603050405020304" pitchFamily="18" charset="0"/>
+              </a:rPr>
               <a:t> </a:t>
             </a:r>
           </a:p>
           <a:p>
-            <a:pPr lvl="1"/>
+            <a:pPr lvl="1" algn="just"/>
             <a:r>
-              <a:rPr lang="en-IN" sz="2000" dirty="0"/>
+              <a:rPr lang="en-IN" sz="2000" dirty="0">
+                <a:latin typeface="Times New Roman" panose="02020603050405020304" pitchFamily="18" charset="0"/>
+                <a:cs typeface="Times New Roman" panose="02020603050405020304" pitchFamily="18" charset="0"/>
+              </a:rPr>
               <a:t>Aggregates papers from </a:t>
             </a:r>
             <a:r>
-              <a:rPr lang="en-IN" sz="2000" dirty="0" err="1"/>
+              <a:rPr lang="en-IN" sz="2000" dirty="0" err="1">
+                <a:latin typeface="Times New Roman" panose="02020603050405020304" pitchFamily="18" charset="0"/>
+                <a:cs typeface="Times New Roman" panose="02020603050405020304" pitchFamily="18" charset="0"/>
+              </a:rPr>
               <a:t>arXiv</a:t>
             </a:r>
             <a:r>
-              <a:rPr lang="en-IN" sz="2000" dirty="0"/>
+              <a:rPr lang="en-IN" sz="2000" dirty="0">
+                <a:latin typeface="Times New Roman" panose="02020603050405020304" pitchFamily="18" charset="0"/>
+                <a:cs typeface="Times New Roman" panose="02020603050405020304" pitchFamily="18" charset="0"/>
+              </a:rPr>
               <a:t>, PubMed, Semantic Scholar, journals, and repositories. </a:t>
             </a:r>
           </a:p>
           <a:p>
-            <a:pPr lvl="1"/>
+            <a:pPr lvl="1" algn="just"/>
             <a:r>
-              <a:rPr lang="en-IN" sz="2000" dirty="0"/>
+              <a:rPr lang="en-IN" sz="2000" dirty="0">
+                <a:latin typeface="Times New Roman" panose="02020603050405020304" pitchFamily="18" charset="0"/>
+                <a:cs typeface="Times New Roman" panose="02020603050405020304" pitchFamily="18" charset="0"/>
+              </a:rPr>
               <a:t>Generates concise literature reviews and comparative summaries. </a:t>
             </a:r>
           </a:p>
           <a:p>
+            <a:pPr algn="just"/>
             <a:r>
-              <a:rPr lang="en-IN" sz="2000" b="1" dirty="0"/>
+              <a:rPr lang="en-IN" sz="2000" b="1" dirty="0">
+                <a:latin typeface="Times New Roman" panose="02020603050405020304" pitchFamily="18" charset="0"/>
+                <a:cs typeface="Times New Roman" panose="02020603050405020304" pitchFamily="18" charset="0"/>
+              </a:rPr>
               <a:t>Multimodal Understanding</a:t>
             </a:r>
             <a:r>
-              <a:rPr lang="en-IN" sz="2000" dirty="0"/>
+              <a:rPr lang="en-IN" sz="2000" dirty="0">
+                <a:latin typeface="Times New Roman" panose="02020603050405020304" pitchFamily="18" charset="0"/>
+                <a:cs typeface="Times New Roman" panose="02020603050405020304" pitchFamily="18" charset="0"/>
+              </a:rPr>
               <a:t> </a:t>
             </a:r>
           </a:p>
           <a:p>
-            <a:pPr lvl="1"/>
+            <a:pPr lvl="1" algn="just"/>
             <a:r>
-              <a:rPr lang="en-IN" sz="2000" dirty="0"/>
+              <a:rPr lang="en-IN" sz="2000" dirty="0">
+                <a:latin typeface="Times New Roman" panose="02020603050405020304" pitchFamily="18" charset="0"/>
+                <a:cs typeface="Times New Roman" panose="02020603050405020304" pitchFamily="18" charset="0"/>
+              </a:rPr>
               <a:t>Accepts PDFs, notes, tables, charts, and images. </a:t>
             </a:r>
           </a:p>
           <a:p>
-            <a:pPr lvl="1"/>
+            <a:pPr lvl="1" algn="just"/>
             <a:r>
-              <a:rPr lang="en-IN" sz="2000" dirty="0"/>
+              <a:rPr lang="en-IN" sz="2000" dirty="0">
+                <a:latin typeface="Times New Roman" panose="02020603050405020304" pitchFamily="18" charset="0"/>
+                <a:cs typeface="Times New Roman" panose="02020603050405020304" pitchFamily="18" charset="0"/>
+              </a:rPr>
               <a:t>Extracts methodologies, findings, limitations, and references. </a:t>
             </a:r>
           </a:p>
           <a:p>
+            <a:pPr algn="just"/>
             <a:r>
-              <a:rPr lang="en-IN" sz="2000" b="1" dirty="0"/>
+              <a:rPr lang="en-IN" sz="2000" b="1" dirty="0">
+                <a:latin typeface="Times New Roman" panose="02020603050405020304" pitchFamily="18" charset="0"/>
+                <a:cs typeface="Times New Roman" panose="02020603050405020304" pitchFamily="18" charset="0"/>
+              </a:rPr>
               <a:t>Predictive Intelligence</a:t>
             </a:r>
             <a:r>
-              <a:rPr lang="en-IN" sz="2000" dirty="0"/>
+              <a:rPr lang="en-IN" sz="2000" dirty="0">
+                <a:latin typeface="Times New Roman" panose="02020603050405020304" pitchFamily="18" charset="0"/>
+                <a:cs typeface="Times New Roman" panose="02020603050405020304" pitchFamily="18" charset="0"/>
+              </a:rPr>
               <a:t> </a:t>
             </a:r>
           </a:p>
           <a:p>
-            <a:pPr lvl="1"/>
+            <a:pPr lvl="1" algn="just"/>
             <a:r>
-              <a:rPr lang="en-IN" sz="2000" dirty="0"/>
+              <a:rPr lang="en-IN" sz="2000" dirty="0">
+                <a:latin typeface="Times New Roman" panose="02020603050405020304" pitchFamily="18" charset="0"/>
+                <a:cs typeface="Times New Roman" panose="02020603050405020304" pitchFamily="18" charset="0"/>
+              </a:rPr>
               <a:t>Detects citation gaps and underexplored research areas. </a:t>
             </a:r>
           </a:p>
           <a:p>
-            <a:pPr lvl="1"/>
+            <a:pPr lvl="1" algn="just"/>
             <a:r>
-              <a:rPr lang="en-IN" sz="2000" dirty="0"/>
+              <a:rPr lang="en-IN" sz="2000" dirty="0">
+                <a:latin typeface="Times New Roman" panose="02020603050405020304" pitchFamily="18" charset="0"/>
+                <a:cs typeface="Times New Roman" panose="02020603050405020304" pitchFamily="18" charset="0"/>
+              </a:rPr>
               <a:t>Forecasts emerging topics using publication and citation trends. </a:t>
             </a:r>
           </a:p>
@@ -14932,10 +15494,16 @@
           <a:lstStyle/>
           <a:p>
             <a:r>
-              <a:rPr lang="en-US" sz="2400" b="1"/>
+              <a:rPr lang="en-US" sz="2400" b="1" dirty="0">
+                <a:latin typeface="Times New Roman" panose="02020603050405020304" pitchFamily="18" charset="0"/>
+                <a:cs typeface="Times New Roman" panose="02020603050405020304" pitchFamily="18" charset="0"/>
+              </a:rPr>
               <a:t>Proposed Solution -</a:t>
             </a:r>
-            <a:endParaRPr lang="en-IN" sz="2400" b="1"/>
+            <a:endParaRPr lang="en-IN" sz="2400" b="1" dirty="0">
+              <a:latin typeface="Times New Roman" panose="02020603050405020304" pitchFamily="18" charset="0"/>
+              <a:cs typeface="Times New Roman" panose="02020603050405020304" pitchFamily="18" charset="0"/>
+            </a:endParaRPr>
           </a:p>
         </p:txBody>
       </p:sp>
@@ -14983,8 +15551,8 @@
         </p:nvSpPr>
         <p:spPr>
           <a:xfrm>
-            <a:off x="775354" y="740469"/>
-            <a:ext cx="10517957" cy="5324535"/>
+            <a:off x="754144" y="740469"/>
+            <a:ext cx="10539167" cy="5324535"/>
           </a:xfrm>
           <a:prstGeom prst="rect">
             <a:avLst/>
@@ -14998,44 +15566,71 @@
           <a:lstStyle/>
           <a:p>
             <a:r>
-              <a:rPr lang="en-IN" sz="2000" b="1" dirty="0"/>
+              <a:rPr lang="en-IN" sz="2000" b="1" dirty="0">
+                <a:latin typeface="Times New Roman" panose="02020603050405020304" pitchFamily="18" charset="0"/>
+                <a:cs typeface="Times New Roman" panose="02020603050405020304" pitchFamily="18" charset="0"/>
+              </a:rPr>
               <a:t>IBM Technology Stack</a:t>
             </a:r>
-            <a:endParaRPr lang="en-IN" sz="2000" dirty="0"/>
+            <a:endParaRPr lang="en-IN" sz="2000" dirty="0">
+              <a:latin typeface="Times New Roman" panose="02020603050405020304" pitchFamily="18" charset="0"/>
+              <a:cs typeface="Times New Roman" panose="02020603050405020304" pitchFamily="18" charset="0"/>
+            </a:endParaRPr>
           </a:p>
           <a:p>
             <a:r>
-              <a:rPr lang="en-IN" sz="2000" dirty="0"/>
+              <a:rPr lang="en-IN" sz="2000" dirty="0">
+                <a:latin typeface="Times New Roman" panose="02020603050405020304" pitchFamily="18" charset="0"/>
+                <a:cs typeface="Times New Roman" panose="02020603050405020304" pitchFamily="18" charset="0"/>
+              </a:rPr>
               <a:t>IBM Orchestrate – Agent coordination </a:t>
             </a:r>
           </a:p>
           <a:p>
             <a:r>
-              <a:rPr lang="en-IN" sz="2000" dirty="0"/>
+              <a:rPr lang="en-IN" sz="2000" dirty="0">
+                <a:latin typeface="Times New Roman" panose="02020603050405020304" pitchFamily="18" charset="0"/>
+                <a:cs typeface="Times New Roman" panose="02020603050405020304" pitchFamily="18" charset="0"/>
+              </a:rPr>
               <a:t>IBM </a:t>
             </a:r>
             <a:r>
-              <a:rPr lang="en-IN" sz="2000" dirty="0" err="1"/>
+              <a:rPr lang="en-IN" sz="2000" dirty="0" err="1">
+                <a:latin typeface="Times New Roman" panose="02020603050405020304" pitchFamily="18" charset="0"/>
+                <a:cs typeface="Times New Roman" panose="02020603050405020304" pitchFamily="18" charset="0"/>
+              </a:rPr>
               <a:t>Langflow</a:t>
             </a:r>
             <a:r>
-              <a:rPr lang="en-IN" sz="2000" dirty="0"/>
+              <a:rPr lang="en-IN" sz="2000" dirty="0">
+                <a:latin typeface="Times New Roman" panose="02020603050405020304" pitchFamily="18" charset="0"/>
+                <a:cs typeface="Times New Roman" panose="02020603050405020304" pitchFamily="18" charset="0"/>
+              </a:rPr>
               <a:t> – Workflow orchestration </a:t>
             </a:r>
           </a:p>
           <a:p>
             <a:r>
-              <a:rPr lang="en-IN" sz="2000" dirty="0"/>
+              <a:rPr lang="en-IN" sz="2000" dirty="0">
+                <a:latin typeface="Times New Roman" panose="02020603050405020304" pitchFamily="18" charset="0"/>
+                <a:cs typeface="Times New Roman" panose="02020603050405020304" pitchFamily="18" charset="0"/>
+              </a:rPr>
               <a:t>IBM Granite Models – Reasoning, summarization, embeddings, vision </a:t>
             </a:r>
           </a:p>
           <a:p>
             <a:r>
-              <a:rPr lang="en-IN" sz="2000" dirty="0" err="1"/>
+              <a:rPr lang="en-IN" sz="2000" dirty="0" err="1">
+                <a:latin typeface="Times New Roman" panose="02020603050405020304" pitchFamily="18" charset="0"/>
+                <a:cs typeface="Times New Roman" panose="02020603050405020304" pitchFamily="18" charset="0"/>
+              </a:rPr>
               <a:t>Neo4j</a:t>
             </a:r>
             <a:r>
-              <a:rPr lang="en-IN" sz="2000" dirty="0"/>
+              <a:rPr lang="en-IN" sz="2000" dirty="0">
+                <a:latin typeface="Times New Roman" panose="02020603050405020304" pitchFamily="18" charset="0"/>
+                <a:cs typeface="Times New Roman" panose="02020603050405020304" pitchFamily="18" charset="0"/>
+              </a:rPr>
               <a:t> + Milvus/Chroma – Knowledge graph and vector storage</a:t>
             </a:r>
           </a:p>
@@ -15044,10 +15639,16 @@
               <a:buNone/>
             </a:pPr>
             <a:r>
-              <a:rPr lang="en-US" sz="2000" b="1" dirty="0"/>
+              <a:rPr lang="en-US" sz="2000" b="1" dirty="0">
+                <a:latin typeface="Times New Roman" panose="02020603050405020304" pitchFamily="18" charset="0"/>
+                <a:cs typeface="Times New Roman" panose="02020603050405020304" pitchFamily="18" charset="0"/>
+              </a:rPr>
               <a:t>Dashboard Capabilities</a:t>
             </a:r>
-            <a:endParaRPr lang="en-US" sz="2000" dirty="0"/>
+            <a:endParaRPr lang="en-US" sz="2000" dirty="0">
+              <a:latin typeface="Times New Roman" panose="02020603050405020304" pitchFamily="18" charset="0"/>
+              <a:cs typeface="Times New Roman" panose="02020603050405020304" pitchFamily="18" charset="0"/>
+            </a:endParaRPr>
           </a:p>
           <a:p>
             <a:pPr>
@@ -15055,7 +15656,10 @@
               <a:buChar char="•"/>
             </a:pPr>
             <a:r>
-              <a:rPr lang="en-US" sz="2000" dirty="0"/>
+              <a:rPr lang="en-US" sz="2000" dirty="0">
+                <a:latin typeface="Times New Roman" panose="02020603050405020304" pitchFamily="18" charset="0"/>
+                <a:cs typeface="Times New Roman" panose="02020603050405020304" pitchFamily="18" charset="0"/>
+              </a:rPr>
               <a:t>Topic clustering and knowledge graphs </a:t>
             </a:r>
           </a:p>
@@ -15065,7 +15669,10 @@
               <a:buChar char="•"/>
             </a:pPr>
             <a:r>
-              <a:rPr lang="en-US" sz="2000" dirty="0"/>
+              <a:rPr lang="en-US" sz="2000" dirty="0">
+                <a:latin typeface="Times New Roman" panose="02020603050405020304" pitchFamily="18" charset="0"/>
+                <a:cs typeface="Times New Roman" panose="02020603050405020304" pitchFamily="18" charset="0"/>
+              </a:rPr>
               <a:t>Citation maps and influential paper discovery </a:t>
             </a:r>
           </a:p>
@@ -15075,7 +15682,10 @@
               <a:buChar char="•"/>
             </a:pPr>
             <a:r>
-              <a:rPr lang="en-US" sz="2000" dirty="0"/>
+              <a:rPr lang="en-US" sz="2000" dirty="0">
+                <a:latin typeface="Times New Roman" panose="02020603050405020304" pitchFamily="18" charset="0"/>
+                <a:cs typeface="Times New Roman" panose="02020603050405020304" pitchFamily="18" charset="0"/>
+              </a:rPr>
               <a:t>Publication and keyword trend analysis </a:t>
             </a:r>
           </a:p>
@@ -15085,7 +15695,10 @@
               <a:buChar char="•"/>
             </a:pPr>
             <a:r>
-              <a:rPr lang="en-US" sz="2000" dirty="0"/>
+              <a:rPr lang="en-US" sz="2000" dirty="0">
+                <a:latin typeface="Times New Roman" panose="02020603050405020304" pitchFamily="18" charset="0"/>
+                <a:cs typeface="Times New Roman" panose="02020603050405020304" pitchFamily="18" charset="0"/>
+              </a:rPr>
               <a:t>Suggested future research directions </a:t>
             </a:r>
           </a:p>
@@ -15095,23 +15708,38 @@
               <a:buChar char="•"/>
             </a:pPr>
             <a:r>
-              <a:rPr lang="en-US" sz="2000" b="1" dirty="0"/>
+              <a:rPr lang="en-US" sz="2000" b="1" dirty="0">
+                <a:latin typeface="Times New Roman" panose="02020603050405020304" pitchFamily="18" charset="0"/>
+                <a:cs typeface="Times New Roman" panose="02020603050405020304" pitchFamily="18" charset="0"/>
+              </a:rPr>
               <a:t>Innovation</a:t>
             </a:r>
             <a:br>
-              <a:rPr lang="en-US" sz="2000" dirty="0"/>
+              <a:rPr lang="en-US" sz="2000" dirty="0">
+                <a:latin typeface="Times New Roman" panose="02020603050405020304" pitchFamily="18" charset="0"/>
+                <a:cs typeface="Times New Roman" panose="02020603050405020304" pitchFamily="18" charset="0"/>
+              </a:rPr>
             </a:br>
             <a:r>
-              <a:rPr lang="en-US" sz="2000" dirty="0"/>
+              <a:rPr lang="en-US" sz="2000" dirty="0">
+                <a:latin typeface="Times New Roman" panose="02020603050405020304" pitchFamily="18" charset="0"/>
+                <a:cs typeface="Times New Roman" panose="02020603050405020304" pitchFamily="18" charset="0"/>
+              </a:rPr>
               <a:t>Autonomous research cycle: </a:t>
             </a:r>
           </a:p>
           <a:p>
             <a:r>
-              <a:rPr lang="en-US" sz="2000" i="1" dirty="0"/>
+              <a:rPr lang="en-US" sz="2000" i="1" dirty="0">
+                <a:latin typeface="Times New Roman" panose="02020603050405020304" pitchFamily="18" charset="0"/>
+                <a:cs typeface="Times New Roman" panose="02020603050405020304" pitchFamily="18" charset="0"/>
+              </a:rPr>
               <a:t>Search → Read → Analyze → Infer → Predict</a:t>
             </a:r>
-            <a:endParaRPr lang="en-US" sz="2000" dirty="0"/>
+            <a:endParaRPr lang="en-US" sz="2000" dirty="0">
+              <a:latin typeface="Times New Roman" panose="02020603050405020304" pitchFamily="18" charset="0"/>
+              <a:cs typeface="Times New Roman" panose="02020603050405020304" pitchFamily="18" charset="0"/>
+            </a:endParaRPr>
           </a:p>
           <a:p>
             <a:pPr marL="285750" indent="-285750">
@@ -15119,7 +15747,10 @@
               <a:buChar char="•"/>
             </a:pPr>
             <a:r>
-              <a:rPr lang="en-US" sz="2000" dirty="0"/>
+              <a:rPr lang="en-US" sz="2000" dirty="0">
+                <a:latin typeface="Times New Roman" panose="02020603050405020304" pitchFamily="18" charset="0"/>
+                <a:cs typeface="Times New Roman" panose="02020603050405020304" pitchFamily="18" charset="0"/>
+              </a:rPr>
               <a:t>Citation-gap recommendations resembling peer-review feedback</a:t>
             </a:r>
           </a:p>
@@ -15129,7 +15760,10 @@
               <a:buChar char="•"/>
             </a:pPr>
             <a:r>
-              <a:rPr lang="en-US" sz="2000" dirty="0"/>
+              <a:rPr lang="en-US" sz="2000" dirty="0">
+                <a:latin typeface="Times New Roman" panose="02020603050405020304" pitchFamily="18" charset="0"/>
+                <a:cs typeface="Times New Roman" panose="02020603050405020304" pitchFamily="18" charset="0"/>
+              </a:rPr>
               <a:t>Continuous knowledge graph updates for an always-current research assistant</a:t>
             </a:r>
           </a:p>
@@ -15138,7 +15772,10 @@
               <a:buNone/>
             </a:pPr>
             <a:r>
-              <a:rPr lang="en-US" sz="2000" dirty="0"/>
+              <a:rPr lang="en-US" sz="2000" dirty="0">
+                <a:latin typeface="Times New Roman" panose="02020603050405020304" pitchFamily="18" charset="0"/>
+                <a:cs typeface="Times New Roman" panose="02020603050405020304" pitchFamily="18" charset="0"/>
+              </a:rPr>
               <a:t>This version is suitable for a hackathon or proposal presentation and should fit neatly into two slides with minimal formatting adjustments.</a:t>
             </a:r>
           </a:p>
@@ -15209,10 +15846,16 @@
           <a:lstStyle/>
           <a:p>
             <a:r>
-              <a:rPr lang="en-US" sz="2400" b="1"/>
+              <a:rPr lang="en-US" sz="2400" b="1" dirty="0">
+                <a:latin typeface="Times New Roman" panose="02020603050405020304" pitchFamily="18" charset="0"/>
+                <a:cs typeface="Times New Roman" panose="02020603050405020304" pitchFamily="18" charset="0"/>
+              </a:rPr>
               <a:t>Technology Used</a:t>
             </a:r>
-            <a:endParaRPr lang="en-IN" sz="2400" b="1"/>
+            <a:endParaRPr lang="en-IN" sz="2400" b="1" dirty="0">
+              <a:latin typeface="Times New Roman" panose="02020603050405020304" pitchFamily="18" charset="0"/>
+              <a:cs typeface="Times New Roman" panose="02020603050405020304" pitchFamily="18" charset="0"/>
+            </a:endParaRPr>
           </a:p>
         </p:txBody>
       </p:sp>
@@ -15231,7 +15874,7 @@
         <p:spPr>
           <a:xfrm>
             <a:off x="777240" y="1207008"/>
-            <a:ext cx="10515600" cy="5324535"/>
+            <a:ext cx="10515600" cy="5016758"/>
           </a:xfrm>
           <a:prstGeom prst="rect">
             <a:avLst/>
@@ -15245,7 +15888,10 @@
           <a:lstStyle/>
           <a:p>
             <a:r>
-              <a:rPr lang="en-IN" sz="2000" dirty="0"/>
+              <a:rPr lang="en-IN" sz="2000" dirty="0">
+                <a:latin typeface="Times New Roman" panose="02020603050405020304" pitchFamily="18" charset="0"/>
+                <a:cs typeface="Times New Roman" panose="02020603050405020304" pitchFamily="18" charset="0"/>
+              </a:rPr>
               <a:t> </a:t>
             </a:r>
           </a:p>
@@ -15255,27 +15901,45 @@
               <a:buChar char="•"/>
             </a:pPr>
             <a:r>
-              <a:rPr lang="en-IN" sz="2000" b="1" dirty="0"/>
+              <a:rPr lang="en-IN" sz="2000" b="1" dirty="0">
+                <a:latin typeface="Times New Roman" panose="02020603050405020304" pitchFamily="18" charset="0"/>
+                <a:cs typeface="Times New Roman" panose="02020603050405020304" pitchFamily="18" charset="0"/>
+              </a:rPr>
               <a:t>IBM Granite Model (</a:t>
             </a:r>
             <a:r>
-              <a:rPr lang="en-IN" sz="2000" b="1" dirty="0" err="1"/>
+              <a:rPr lang="en-IN" sz="2000" b="1" dirty="0" err="1">
+                <a:latin typeface="Times New Roman" panose="02020603050405020304" pitchFamily="18" charset="0"/>
+                <a:cs typeface="Times New Roman" panose="02020603050405020304" pitchFamily="18" charset="0"/>
+              </a:rPr>
               <a:t>ibm</a:t>
             </a:r>
             <a:r>
-              <a:rPr lang="en-IN" sz="2000" b="1" dirty="0"/>
+              <a:rPr lang="en-IN" sz="2000" b="1" dirty="0">
+                <a:latin typeface="Times New Roman" panose="02020603050405020304" pitchFamily="18" charset="0"/>
+                <a:cs typeface="Times New Roman" panose="02020603050405020304" pitchFamily="18" charset="0"/>
+              </a:rPr>
               <a:t>-granite-3-2-</a:t>
             </a:r>
             <a:r>
-              <a:rPr lang="en-IN" sz="2000" b="1" dirty="0" err="1"/>
+              <a:rPr lang="en-IN" sz="2000" b="1" dirty="0" err="1">
+                <a:latin typeface="Times New Roman" panose="02020603050405020304" pitchFamily="18" charset="0"/>
+                <a:cs typeface="Times New Roman" panose="02020603050405020304" pitchFamily="18" charset="0"/>
+              </a:rPr>
               <a:t>8b</a:t>
             </a:r>
             <a:r>
-              <a:rPr lang="en-IN" sz="2000" b="1" dirty="0"/>
+              <a:rPr lang="en-IN" sz="2000" b="1" dirty="0">
+                <a:latin typeface="Times New Roman" panose="02020603050405020304" pitchFamily="18" charset="0"/>
+                <a:cs typeface="Times New Roman" panose="02020603050405020304" pitchFamily="18" charset="0"/>
+              </a:rPr>
               <a:t>)</a:t>
             </a:r>
             <a:r>
-              <a:rPr lang="en-IN" sz="2000" dirty="0"/>
+              <a:rPr lang="en-IN" sz="2000" dirty="0">
+                <a:latin typeface="Times New Roman" panose="02020603050405020304" pitchFamily="18" charset="0"/>
+                <a:cs typeface="Times New Roman" panose="02020603050405020304" pitchFamily="18" charset="0"/>
+              </a:rPr>
               <a:t> – For natural language understanding, reasoning, literature synthesis, research gap identification, and personalized recommendations. </a:t>
             </a:r>
           </a:p>
@@ -15285,11 +15949,17 @@
               <a:buChar char="•"/>
             </a:pPr>
             <a:r>
-              <a:rPr lang="en-IN" sz="2000" b="1" dirty="0"/>
+              <a:rPr lang="en-IN" sz="2000" b="1" dirty="0">
+                <a:latin typeface="Times New Roman" panose="02020603050405020304" pitchFamily="18" charset="0"/>
+                <a:cs typeface="Times New Roman" panose="02020603050405020304" pitchFamily="18" charset="0"/>
+              </a:rPr>
               <a:t>IBM Cloud</a:t>
             </a:r>
             <a:r>
-              <a:rPr lang="en-IN" sz="2000" dirty="0"/>
+              <a:rPr lang="en-IN" sz="2000" dirty="0">
+                <a:latin typeface="Times New Roman" panose="02020603050405020304" pitchFamily="18" charset="0"/>
+                <a:cs typeface="Times New Roman" panose="02020603050405020304" pitchFamily="18" charset="0"/>
+              </a:rPr>
               <a:t> – Provides the infrastructure to build, deploy, and scale the Research Agent efficiently, ensuring a reliable, secure, and scalable environment. </a:t>
             </a:r>
           </a:p>
@@ -15299,11 +15969,17 @@
               <a:buChar char="•"/>
             </a:pPr>
             <a:r>
-              <a:rPr lang="en-IN" sz="2000" b="1" dirty="0"/>
+              <a:rPr lang="en-IN" sz="2000" b="1" dirty="0">
+                <a:latin typeface="Times New Roman" panose="02020603050405020304" pitchFamily="18" charset="0"/>
+                <a:cs typeface="Times New Roman" panose="02020603050405020304" pitchFamily="18" charset="0"/>
+              </a:rPr>
               <a:t>Lightweight RAG System</a:t>
             </a:r>
             <a:r>
-              <a:rPr lang="en-IN" sz="2000" dirty="0"/>
+              <a:rPr lang="en-IN" sz="2000" dirty="0">
+                <a:latin typeface="Times New Roman" panose="02020603050405020304" pitchFamily="18" charset="0"/>
+                <a:cs typeface="Times New Roman" panose="02020603050405020304" pitchFamily="18" charset="0"/>
+              </a:rPr>
               <a:t> – Retrieves relevant publications, papers, and knowledge-base entries before generating responses, making the Research Agent more accurate, explainable, and trustworthy. </a:t>
             </a:r>
           </a:p>
@@ -15313,15 +15989,24 @@
               <a:buChar char="•"/>
             </a:pPr>
             <a:r>
-              <a:rPr lang="en-IN" sz="2000" b="1" dirty="0"/>
+              <a:rPr lang="en-IN" sz="2000" b="1" dirty="0">
+                <a:latin typeface="Times New Roman" panose="02020603050405020304" pitchFamily="18" charset="0"/>
+                <a:cs typeface="Times New Roman" panose="02020603050405020304" pitchFamily="18" charset="0"/>
+              </a:rPr>
               <a:t>IBM </a:t>
             </a:r>
             <a:r>
-              <a:rPr lang="en-IN" sz="2000" b="1" dirty="0" err="1"/>
+              <a:rPr lang="en-IN" sz="2000" b="1" dirty="0" err="1">
+                <a:latin typeface="Times New Roman" panose="02020603050405020304" pitchFamily="18" charset="0"/>
+                <a:cs typeface="Times New Roman" panose="02020603050405020304" pitchFamily="18" charset="0"/>
+              </a:rPr>
               <a:t>Watsonx.ai</a:t>
             </a:r>
             <a:r>
-              <a:rPr lang="en-IN" sz="2000" dirty="0"/>
+              <a:rPr lang="en-IN" sz="2000" dirty="0">
+                <a:latin typeface="Times New Roman" panose="02020603050405020304" pitchFamily="18" charset="0"/>
+                <a:cs typeface="Times New Roman" panose="02020603050405020304" pitchFamily="18" charset="0"/>
+              </a:rPr>
               <a:t> – For model deployment, embedding generation, agent orchestration support, and AI governance. </a:t>
             </a:r>
           </a:p>
@@ -15331,11 +16016,17 @@
               <a:buChar char="•"/>
             </a:pPr>
             <a:r>
-              <a:rPr lang="en-IN" sz="2000" b="1" dirty="0"/>
+              <a:rPr lang="en-IN" sz="2000" b="1" dirty="0">
+                <a:latin typeface="Times New Roman" panose="02020603050405020304" pitchFamily="18" charset="0"/>
+                <a:cs typeface="Times New Roman" panose="02020603050405020304" pitchFamily="18" charset="0"/>
+              </a:rPr>
               <a:t>Python</a:t>
             </a:r>
             <a:r>
-              <a:rPr lang="en-IN" sz="2000" dirty="0"/>
+              <a:rPr lang="en-IN" sz="2000" dirty="0">
+                <a:latin typeface="Times New Roman" panose="02020603050405020304" pitchFamily="18" charset="0"/>
+                <a:cs typeface="Times New Roman" panose="02020603050405020304" pitchFamily="18" charset="0"/>
+              </a:rPr>
               <a:t> – Serves as the core development language, offering rich ecosystems for machine learning, data processing, visualization, and integration with IBM technologies. </a:t>
             </a:r>
           </a:p>
@@ -15345,17 +16036,29 @@
               <a:buChar char="•"/>
             </a:pPr>
             <a:r>
-              <a:rPr lang="en-IN" sz="2000" b="1" dirty="0"/>
+              <a:rPr lang="en-IN" sz="2000" b="1" dirty="0">
+                <a:latin typeface="Times New Roman" panose="02020603050405020304" pitchFamily="18" charset="0"/>
+                <a:cs typeface="Times New Roman" panose="02020603050405020304" pitchFamily="18" charset="0"/>
+              </a:rPr>
               <a:t>Flask</a:t>
             </a:r>
             <a:r>
-              <a:rPr lang="en-IN" sz="2000" dirty="0"/>
+              <a:rPr lang="en-IN" sz="2000" dirty="0">
+                <a:latin typeface="Times New Roman" panose="02020603050405020304" pitchFamily="18" charset="0"/>
+                <a:cs typeface="Times New Roman" panose="02020603050405020304" pitchFamily="18" charset="0"/>
+              </a:rPr>
               <a:t> – Used to develop backend APIs and services that connect the user interface with AI models, vector databases, and knowledge graph components, enabling efficient request handling and scalable deployment.</a:t>
             </a:r>
-            <a:endParaRPr lang="en-US" sz="2000" dirty="0"/>
+            <a:endParaRPr lang="en-US" sz="2000" dirty="0">
+              <a:latin typeface="Times New Roman" panose="02020603050405020304" pitchFamily="18" charset="0"/>
+              <a:cs typeface="Times New Roman" panose="02020603050405020304" pitchFamily="18" charset="0"/>
+            </a:endParaRPr>
           </a:p>
           <a:p>
-            <a:endParaRPr lang="en-IN" sz="2000" dirty="0"/>
+            <a:endParaRPr lang="en-IN" sz="2000" dirty="0">
+              <a:latin typeface="Times New Roman" panose="02020603050405020304" pitchFamily="18" charset="0"/>
+              <a:cs typeface="Times New Roman" panose="02020603050405020304" pitchFamily="18" charset="0"/>
+            </a:endParaRPr>
           </a:p>
         </p:txBody>
       </p:sp>
@@ -15445,6 +16148,8 @@
             </a:pPr>
             <a:r>
               <a:rPr lang="en-US" sz="2400" b="1" dirty="0">
+                <a:latin typeface="Times New Roman" panose="02020603050405020304" pitchFamily="18" charset="0"/>
+                <a:cs typeface="Times New Roman" panose="02020603050405020304" pitchFamily="18" charset="0"/>
                 <a:sym typeface="Times New Roman"/>
               </a:rPr>
               <a:t>IBM Bob</a:t>
@@ -15454,20 +16159,24 @@
                 <a:solidFill>
                   <a:srgbClr val="051D3A"/>
                 </a:solidFill>
-                <a:latin typeface="Times New Roman"/>
+                <a:latin typeface="Times New Roman" panose="02020603050405020304" pitchFamily="18" charset="0"/>
                 <a:ea typeface="Times New Roman"/>
-                <a:cs typeface="Times New Roman"/>
+                <a:cs typeface="Times New Roman" panose="02020603050405020304" pitchFamily="18" charset="0"/>
                 <a:sym typeface="Times New Roman"/>
               </a:rPr>
               <a:t> </a:t>
             </a:r>
             <a:r>
               <a:rPr lang="en-US" sz="2400" b="1" dirty="0">
+                <a:latin typeface="Times New Roman" panose="02020603050405020304" pitchFamily="18" charset="0"/>
+                <a:cs typeface="Times New Roman" panose="02020603050405020304" pitchFamily="18" charset="0"/>
                 <a:sym typeface="Times New Roman"/>
               </a:rPr>
               <a:t>workflow -</a:t>
             </a:r>
             <a:endParaRPr sz="2400" b="1" dirty="0">
+              <a:latin typeface="Times New Roman" panose="02020603050405020304" pitchFamily="18" charset="0"/>
+              <a:cs typeface="Times New Roman" panose="02020603050405020304" pitchFamily="18" charset="0"/>
               <a:sym typeface="Times New Roman"/>
             </a:endParaRPr>
           </a:p>
@@ -15596,18 +16305,21 @@
           <a:p>
             <a:pPr lvl="0"/>
             <a:r>
-              <a:rPr lang="en-US" sz="2400" b="1">
+              <a:rPr lang="en-US" sz="2400" b="1" dirty="0">
                 <a:solidFill>
                   <a:schemeClr val="dk1"/>
                 </a:solidFill>
-                <a:latin typeface="Calibri"/>
+                <a:latin typeface="Times New Roman" panose="02020603050405020304" pitchFamily="18" charset="0"/>
                 <a:ea typeface="Calibri"/>
-                <a:cs typeface="Calibri"/>
+                <a:cs typeface="Times New Roman" panose="02020603050405020304" pitchFamily="18" charset="0"/>
                 <a:sym typeface="Calibri"/>
               </a:rPr>
               <a:t>Architecture blueprint</a:t>
             </a:r>
-            <a:endParaRPr lang="en-US" sz="2400"/>
+            <a:endParaRPr lang="en-US" sz="2400" dirty="0">
+              <a:latin typeface="Times New Roman" panose="02020603050405020304" pitchFamily="18" charset="0"/>
+              <a:cs typeface="Times New Roman" panose="02020603050405020304" pitchFamily="18" charset="0"/>
+            </a:endParaRPr>
           </a:p>
         </p:txBody>
       </p:sp>
